--- a/docs/pptx/Ch7_D2_ADT_Base_POO.pptx
+++ b/docs/pptx/Ch7_D2_ADT_Base_POO.pptx
@@ -10,9 +10,10 @@
     <p:sldId id="258" r:id="rId4"/>
     <p:sldId id="259" r:id="rId5"/>
     <p:sldId id="260" r:id="rId6"/>
+    <p:sldId id="261" r:id="rId7"/>
   </p:sldIdLst>
   <p:notesMasterIdLst>
-    <p:notesMasterId r:id="rId7"/>
+    <p:notesMasterId r:id="rId8"/>
   </p:notesMasterIdLst>
   <p:sldSz cx="9144000" cy="5143500"/>
   <p:notesSz cx="5143500" cy="9144000"/>
@@ -506,7 +507,11 @@
           <a:p>
             <a:r>
               <a:rPr lang="en-US" dirty="0"/>
-              <a:t/>
+              <a:t>TITRE: Les ADT impératifs :
+Base de la POO
+Critère: Critère D2 — Discussion argumentée
+Objectif de cette présentation : couvrir les concepts clés pour le critère Critère D2 — Discussion argumentée.
+Durée estimée : 1h30 à 2h avec exercices.</a:t>
             </a:r>
             <a:endParaRPr lang="en-US" dirty="0"/>
           </a:p>
@@ -594,7 +599,10 @@
           <a:p>
             <a:r>
               <a:rPr lang="en-US" dirty="0"/>
-              <a:t/>
+              <a:t>PROF: C'est le cœur du critère D2. Les étudiants doivent ARGUMENTER.
+Pour chaque argument, faire le lien :
+- Concept ADT (théorique) → Ce que la POO en a fait (pratique)
+Exercice de discussion : diviser la classe en 5 groupes, chaque groupe prépare 1 argument avec un exemple Java.</a:t>
             </a:r>
             <a:endParaRPr lang="en-US" dirty="0"/>
           </a:p>
@@ -682,7 +690,11 @@
           <a:p>
             <a:r>
               <a:rPr lang="en-US" dirty="0"/>
-              <a:t/>
+              <a:t>PROF: Lien direct entre les 3 types de conditions et Java :
+- PRE: isEmpty() == false → if (isEmpty()) throw new...
+- POST: size += 1 → garanti par le code de push()
+- ERROR: pile vide + pop() → EmptyStackException
+Faire écrire aux étudiants les 3 conditions pour une méthode retirer(montant) d'un compte bancaire.</a:t>
             </a:r>
             <a:endParaRPr lang="en-US" dirty="0"/>
           </a:p>
@@ -770,7 +782,9 @@
           <a:p>
             <a:r>
               <a:rPr lang="en-US" dirty="0"/>
-              <a:t/>
+              <a:t>PROF: Montrer la traduction ligne par ligne.
+Insister : l'ADT est le PLAN, Java est la CONSTRUCTION.
+Exercice : donner une spec ADT Queue et demander de la traduire en interface Java + classe concrète.</a:t>
             </a:r>
             <a:endParaRPr lang="en-US" dirty="0"/>
           </a:p>
@@ -858,7 +872,10 @@
           <a:p>
             <a:r>
               <a:rPr lang="en-US" dirty="0"/>
-              <a:t/>
+              <a:t>PROF: L'ADT ne définit PAS l'héritage ni le polymorphisme.
+C'est la POO qui les a ajoutés.
+Mais les FONDATIONS (encapsulation, abstraction, contrats) viennent des ADT.
+Conclusion pour D2 : 'Les ADT sont la base de la POO car ils ont formalisé les concepts que la POO a ensuite étendus.'</a:t>
             </a:r>
             <a:endParaRPr lang="en-US" dirty="0"/>
           </a:p>
@@ -882,6 +899,100 @@
             <a:fld id="{F7021451-1387-4CA6-816F-3879F97B5CBC}" type="slidenum">
               <a:rPr lang="en-US"/>
               <a:t>5</a:t>
+            </a:fld>
+            <a:endParaRPr lang="en-US"/>
+          </a:p>
+        </p:txBody>
+      </p:sp>
+    </p:spTree>
+    <p:extLst>
+      <p:ext uri="{BB962C8B-B14F-4D97-AF65-F5344CB8AC3E}">
+        <p14:creationId xmlns:p14="http://schemas.microsoft.com/office/powerpoint/2010/main" val="1024086991"/>
+      </p:ext>
+    </p:extLst>
+  </p:cSld>
+  <p:clrMapOvr>
+    <a:masterClrMapping/>
+  </p:clrMapOvr>
+</p:notes>
+</file>
+
+<file path=ppt/notesSlides/notesSlide6.xml><?xml version="1.0" encoding="utf-8"?>
+<p:notes xmlns:a="http://schemas.openxmlformats.org/drawingml/2006/main" xmlns:r="http://schemas.openxmlformats.org/officeDocument/2006/relationships" xmlns:p="http://schemas.openxmlformats.org/presentationml/2006/main">
+  <p:cSld>
+    <p:spTree>
+      <p:nvGrpSpPr>
+        <p:cNvPr id="1" name=""/>
+        <p:cNvGrpSpPr/>
+        <p:nvPr/>
+      </p:nvGrpSpPr>
+      <p:grpSpPr>
+        <a:xfrm>
+          <a:off x="0" y="0"/>
+          <a:ext cx="0" cy="0"/>
+          <a:chOff x="0" y="0"/>
+          <a:chExt cx="0" cy="0"/>
+        </a:xfrm>
+      </p:grpSpPr>
+      <p:sp>
+        <p:nvSpPr>
+          <p:cNvPr id="2" name="Slide Image Placeholder 1"/>
+          <p:cNvSpPr>
+            <a:spLocks noGrp="1" noRot="1" noChangeAspect="1"/>
+          </p:cNvSpPr>
+          <p:nvPr>
+            <p:ph type="sldImg"/>
+          </p:nvPr>
+        </p:nvSpPr>
+        <p:spPr/>
+      </p:sp>
+      <p:sp>
+        <p:nvSpPr>
+          <p:cNvPr id="3" name="Notes Placeholder 2"/>
+          <p:cNvSpPr>
+            <a:spLocks noGrp="1"/>
+          </p:cNvSpPr>
+          <p:nvPr>
+            <p:ph type="body" idx="1"/>
+          </p:nvPr>
+        </p:nvSpPr>
+        <p:spPr/>
+        <p:txBody>
+          <a:bodyPr/>
+          <a:lstStyle/>
+          <a:p>
+            <a:r>
+              <a:rPr lang="en-US" dirty="0"/>
+              <a:t>PROF: Devoir D2 : Rédiger une discussion argumentée (500-800 mots) expliquant pourquoi les ADT impératifs sont la base de la POO.
+Structure attendue :
+1. Introduction + thèse
+2. 3-5 arguments avec exemples
+3. Ce que la POO ajoute
+4. Conclusion
+Rappeler le site pour réviser les arguments.</a:t>
+            </a:r>
+            <a:endParaRPr lang="en-US" dirty="0"/>
+          </a:p>
+        </p:txBody>
+      </p:sp>
+      <p:sp>
+        <p:nvSpPr>
+          <p:cNvPr id="4" name="Slide Number Placeholder 3"/>
+          <p:cNvSpPr>
+            <a:spLocks noGrp="1"/>
+          </p:cNvSpPr>
+          <p:nvPr>
+            <p:ph type="sldNum" sz="quarter" idx="10"/>
+          </p:nvPr>
+        </p:nvSpPr>
+        <p:spPr/>
+        <p:txBody>
+          <a:bodyPr/>
+          <a:lstStyle/>
+          <a:p>
+            <a:fld id="{F7021451-1387-4CA6-816F-3879F97B5CBC}" type="slidenum">
+              <a:rPr lang="en-US"/>
+              <a:t>6</a:t>
             </a:fld>
             <a:endParaRPr lang="en-US"/>
           </a:p>
@@ -1213,7 +1324,7 @@
     <p:bg>
       <p:bgPr>
         <a:solidFill>
-          <a:srgbClr val="1B2A4A"/>
+          <a:srgbClr val="0B2027"/>
         </a:solidFill>
       </p:bgPr>
     </p:bg>
@@ -1240,13 +1351,13 @@
         <p:spPr>
           <a:xfrm>
             <a:off x="0" y="0"/>
-            <a:ext cx="9144000" cy="1097280"/>
+            <a:ext cx="9144000" cy="73152"/>
           </a:xfrm>
           <a:prstGeom prst="rect">
             <a:avLst/>
           </a:prstGeom>
           <a:solidFill>
-            <a:srgbClr val="065A82"/>
+            <a:srgbClr val="0891B2"/>
           </a:solidFill>
           <a:ln/>
         </p:spPr>
@@ -1259,7 +1370,7 @@
         </p:nvSpPr>
         <p:spPr>
           <a:xfrm>
-            <a:off x="731520" y="137160"/>
+            <a:off x="548640" y="365760"/>
             <a:ext cx="2743200" cy="365760"/>
           </a:xfrm>
           <a:prstGeom prst="rect">
@@ -1276,9 +1387,9 @@
               <a:buNone/>
             </a:pPr>
             <a:r>
-              <a:rPr lang="en-US" sz="1400" b="1" dirty="0">
-                <a:solidFill>
-                  <a:srgbClr val="00A896"/>
+              <a:rPr lang="en-US" sz="1200" b="1" spc="400" kern="0" dirty="0">
+                <a:solidFill>
+                  <a:srgbClr val="0891B2"/>
                 </a:solidFill>
                 <a:latin typeface="Calibri" pitchFamily="34" charset="0"/>
                 <a:ea typeface="Calibri" pitchFamily="34" charset="-122"/>
@@ -1286,7 +1397,7 @@
               </a:rPr>
               <a:t>MONDE 2</a:t>
             </a:r>
-            <a:endParaRPr lang="en-US" sz="1400" dirty="0"/>
+            <a:endParaRPr lang="en-US" sz="1200" dirty="0"/>
           </a:p>
         </p:txBody>
       </p:sp>
@@ -1298,8 +1409,8 @@
         </p:nvSpPr>
         <p:spPr>
           <a:xfrm>
-            <a:off x="731520" y="457200"/>
-            <a:ext cx="7315200" cy="457200"/>
+            <a:off x="548640" y="731520"/>
+            <a:ext cx="7315200" cy="365760"/>
           </a:xfrm>
           <a:prstGeom prst="rect">
             <a:avLst/>
@@ -1315,9 +1426,9 @@
               <a:buNone/>
             </a:pPr>
             <a:r>
-              <a:rPr lang="en-US" sz="1200" dirty="0">
-                <a:solidFill>
-                  <a:srgbClr val="E2E8F0"/>
+              <a:rPr lang="en-US" sz="1100" dirty="0">
+                <a:solidFill>
+                  <a:srgbClr val="94A3B8"/>
                 </a:solidFill>
                 <a:latin typeface="Calibri" pitchFamily="34" charset="0"/>
                 <a:ea typeface="Calibri" pitchFamily="34" charset="-122"/>
@@ -1325,7 +1436,7 @@
               </a:rPr>
               <a:t>UNIT 19 : Data Structures &amp; Algorithms</a:t>
             </a:r>
-            <a:endParaRPr lang="en-US" sz="1200" dirty="0"/>
+            <a:endParaRPr lang="en-US" sz="1100" dirty="0"/>
           </a:p>
         </p:txBody>
       </p:sp>
@@ -1337,8 +1448,8 @@
         </p:nvSpPr>
         <p:spPr>
           <a:xfrm>
-            <a:off x="731520" y="1645920"/>
-            <a:ext cx="7315200" cy="640080"/>
+            <a:off x="548640" y="1371600"/>
+            <a:ext cx="8229600" cy="457200"/>
           </a:xfrm>
           <a:prstGeom prst="rect">
             <a:avLst/>
@@ -1354,17 +1465,17 @@
               <a:buNone/>
             </a:pPr>
             <a:r>
-              <a:rPr lang="en-US" sz="4400" b="1" dirty="0">
-                <a:solidFill>
-                  <a:srgbClr val="FFFFFF"/>
-                </a:solidFill>
-                <a:latin typeface="Trebuchet MS" pitchFamily="34" charset="0"/>
-                <a:ea typeface="Trebuchet MS" pitchFamily="34" charset="-122"/>
-                <a:cs typeface="Trebuchet MS" pitchFamily="34" charset="-120"/>
+              <a:rPr lang="en-US" sz="1400" b="1" dirty="0">
+                <a:solidFill>
+                  <a:srgbClr val="0891B2"/>
+                </a:solidFill>
+                <a:latin typeface="Calibri" pitchFamily="34" charset="0"/>
+                <a:ea typeface="Calibri" pitchFamily="34" charset="-122"/>
+                <a:cs typeface="Calibri" pitchFamily="34" charset="-120"/>
               </a:rPr>
               <a:t>Chapitre 7</a:t>
             </a:r>
-            <a:endParaRPr lang="en-US" sz="4400" dirty="0"/>
+            <a:endParaRPr lang="en-US" sz="1400" dirty="0"/>
           </a:p>
         </p:txBody>
       </p:sp>
@@ -1376,8 +1487,8 @@
         </p:nvSpPr>
         <p:spPr>
           <a:xfrm>
-            <a:off x="731520" y="2286000"/>
-            <a:ext cx="7315200" cy="1097280"/>
+            <a:off x="548640" y="2011680"/>
+            <a:ext cx="8229600" cy="1371600"/>
           </a:xfrm>
           <a:prstGeom prst="rect">
             <a:avLst/>
@@ -1393,95 +1504,95 @@
               <a:buNone/>
             </a:pPr>
             <a:r>
-              <a:rPr lang="en-US" sz="3000" b="1" dirty="0">
-                <a:solidFill>
-                  <a:srgbClr val="00A896"/>
-                </a:solidFill>
-                <a:latin typeface="Trebuchet MS" pitchFamily="34" charset="0"/>
-                <a:ea typeface="Trebuchet MS" pitchFamily="34" charset="-122"/>
-                <a:cs typeface="Trebuchet MS" pitchFamily="34" charset="-120"/>
+              <a:rPr lang="en-US" sz="3600" b="1" dirty="0">
+                <a:solidFill>
+                  <a:srgbClr val="FFFFFF"/>
+                </a:solidFill>
+                <a:latin typeface="Calibri" pitchFamily="34" charset="0"/>
+                <a:ea typeface="Calibri" pitchFamily="34" charset="-122"/>
+                <a:cs typeface="Calibri" pitchFamily="34" charset="-120"/>
               </a:rPr>
               <a:t>Les ADT impératifs :</a:t>
             </a:r>
-            <a:endParaRPr lang="en-US" sz="3000" dirty="0"/>
+            <a:endParaRPr lang="en-US" sz="3600" dirty="0"/>
           </a:p>
           <a:p>
             <a:pPr indent="0" marL="0">
               <a:buNone/>
             </a:pPr>
             <a:r>
-              <a:rPr lang="en-US" sz="3000" b="1" dirty="0">
-                <a:solidFill>
-                  <a:srgbClr val="00A896"/>
-                </a:solidFill>
-                <a:latin typeface="Trebuchet MS" pitchFamily="34" charset="0"/>
-                <a:ea typeface="Trebuchet MS" pitchFamily="34" charset="-122"/>
-                <a:cs typeface="Trebuchet MS" pitchFamily="34" charset="-120"/>
-              </a:rPr>
-              <a:t>base de la POO</a:t>
-            </a:r>
-            <a:endParaRPr lang="en-US" sz="3000" dirty="0"/>
-          </a:p>
-        </p:txBody>
-      </p:sp>
-      <p:sp>
-        <p:nvSpPr>
-          <p:cNvPr id="7" name="Shape 5"/>
+              <a:rPr lang="en-US" sz="3600" b="1" dirty="0">
+                <a:solidFill>
+                  <a:srgbClr val="FFFFFF"/>
+                </a:solidFill>
+                <a:latin typeface="Calibri" pitchFamily="34" charset="0"/>
+                <a:ea typeface="Calibri" pitchFamily="34" charset="-122"/>
+                <a:cs typeface="Calibri" pitchFamily="34" charset="-120"/>
+              </a:rPr>
+              <a:t>Base de la POO</a:t>
+            </a:r>
+            <a:endParaRPr lang="en-US" sz="3600" dirty="0"/>
+          </a:p>
+        </p:txBody>
+      </p:sp>
+      <p:sp>
+        <p:nvSpPr>
+          <p:cNvPr id="7" name="Text 5"/>
           <p:cNvSpPr/>
           <p:nvPr/>
         </p:nvSpPr>
         <p:spPr>
           <a:xfrm>
-            <a:off x="731520" y="3657600"/>
-            <a:ext cx="2286000" cy="54864"/>
+            <a:off x="548640" y="3657600"/>
+            <a:ext cx="8229600" cy="365760"/>
+          </a:xfrm>
+          <a:prstGeom prst="rect">
+            <a:avLst/>
+          </a:prstGeom>
+          <a:noFill/>
+          <a:ln/>
+        </p:spPr>
+        <p:txBody>
+          <a:bodyPr wrap="square" rtlCol="0" anchor="ctr"/>
+          <a:lstStyle/>
+          <a:p>
+            <a:pPr indent="0" marL="0">
+              <a:buNone/>
+            </a:pPr>
+            <a:r>
+              <a:rPr lang="en-US" sz="1300" dirty="0">
+                <a:solidFill>
+                  <a:srgbClr val="94A3B8"/>
+                </a:solidFill>
+                <a:latin typeface="Calibri" pitchFamily="34" charset="0"/>
+                <a:ea typeface="Calibri" pitchFamily="34" charset="-122"/>
+                <a:cs typeface="Calibri" pitchFamily="34" charset="-120"/>
+              </a:rPr>
+              <a:t>Critère D2 — Discussion argumentée</a:t>
+            </a:r>
+            <a:endParaRPr lang="en-US" sz="1300" dirty="0"/>
+          </a:p>
+        </p:txBody>
+      </p:sp>
+      <p:sp>
+        <p:nvSpPr>
+          <p:cNvPr id="8" name="Shape 6"/>
+          <p:cNvSpPr/>
+          <p:nvPr/>
+        </p:nvSpPr>
+        <p:spPr>
+          <a:xfrm>
+            <a:off x="0" y="5074920"/>
+            <a:ext cx="9144000" cy="73152"/>
           </a:xfrm>
           <a:prstGeom prst="rect">
             <a:avLst/>
           </a:prstGeom>
           <a:solidFill>
-            <a:srgbClr val="F97316"/>
+            <a:srgbClr val="0891B2"/>
           </a:solidFill>
           <a:ln/>
         </p:spPr>
-      </p:sp>
-      <p:sp>
-        <p:nvSpPr>
-          <p:cNvPr id="8" name="Text 6"/>
-          <p:cNvSpPr/>
-          <p:nvPr/>
-        </p:nvSpPr>
-        <p:spPr>
-          <a:xfrm>
-            <a:off x="731520" y="3840480"/>
-            <a:ext cx="7315200" cy="731520"/>
-          </a:xfrm>
-          <a:prstGeom prst="rect">
-            <a:avLst/>
-          </a:prstGeom>
-          <a:noFill/>
-          <a:ln/>
-        </p:spPr>
-        <p:txBody>
-          <a:bodyPr wrap="square" rtlCol="0" anchor="ctr"/>
-          <a:lstStyle/>
-          <a:p>
-            <a:pPr indent="0" marL="0">
-              <a:buNone/>
-            </a:pPr>
-            <a:r>
-              <a:rPr lang="en-US" sz="1300" i="1" dirty="0">
-                <a:solidFill>
-                  <a:srgbClr val="E2E8F0"/>
-                </a:solidFill>
-                <a:latin typeface="Calibri" pitchFamily="34" charset="0"/>
-                <a:ea typeface="Calibri" pitchFamily="34" charset="-122"/>
-                <a:cs typeface="Calibri" pitchFamily="34" charset="-120"/>
-              </a:rPr>
-              <a:t>D2</a:t>
-            </a:r>
-            <a:endParaRPr lang="en-US" sz="1300" dirty="0"/>
-          </a:p>
-        </p:txBody>
       </p:sp>
     </p:spTree>
   </p:cSld>
@@ -1497,7 +1608,7 @@
     <p:bg>
       <p:bgPr>
         <a:solidFill>
-          <a:srgbClr val="F8FAFC"/>
+          <a:srgbClr val="0B2027"/>
         </a:solidFill>
       </p:bgPr>
     </p:bg>
@@ -1524,13 +1635,13 @@
         <p:spPr>
           <a:xfrm>
             <a:off x="0" y="0"/>
-            <a:ext cx="109728" cy="5143500"/>
+            <a:ext cx="9144000" cy="54864"/>
           </a:xfrm>
           <a:prstGeom prst="rect">
             <a:avLst/>
           </a:prstGeom>
           <a:solidFill>
-            <a:srgbClr val="028090"/>
+            <a:srgbClr val="0891B2"/>
           </a:solidFill>
           <a:ln/>
         </p:spPr>
@@ -1543,7 +1654,7 @@
         </p:nvSpPr>
         <p:spPr>
           <a:xfrm>
-            <a:off x="457200" y="274320"/>
+            <a:off x="548640" y="274320"/>
             <a:ext cx="8229600" cy="548640"/>
           </a:xfrm>
           <a:prstGeom prst="rect">
@@ -1560,17 +1671,17 @@
               <a:buNone/>
             </a:pPr>
             <a:r>
-              <a:rPr lang="en-US" sz="2600" b="1" dirty="0">
-                <a:solidFill>
-                  <a:srgbClr val="1B2A4A"/>
-                </a:solidFill>
-                <a:latin typeface="Trebuchet MS" pitchFamily="34" charset="0"/>
-                <a:ea typeface="Trebuchet MS" pitchFamily="34" charset="-122"/>
-                <a:cs typeface="Trebuchet MS" pitchFamily="34" charset="-120"/>
-              </a:rPr>
-              <a:t>5 arguments : ADT → POO</a:t>
-            </a:r>
-            <a:endParaRPr lang="en-US" sz="2600" dirty="0"/>
+              <a:rPr lang="en-US" sz="2400" b="1" dirty="0">
+                <a:solidFill>
+                  <a:srgbClr val="FFFFFF"/>
+                </a:solidFill>
+                <a:latin typeface="Calibri" pitchFamily="34" charset="0"/>
+                <a:ea typeface="Calibri" pitchFamily="34" charset="-122"/>
+                <a:cs typeface="Calibri" pitchFamily="34" charset="-120"/>
+              </a:rPr>
+              <a:t>5 Arguments : ADT → POO</a:t>
+            </a:r>
+            <a:endParaRPr lang="en-US" sz="2400" dirty="0"/>
           </a:p>
         </p:txBody>
       </p:sp>
@@ -1582,8 +1693,8 @@
         </p:nvSpPr>
         <p:spPr>
           <a:xfrm>
-            <a:off x="640080" y="1005840"/>
-            <a:ext cx="7772400" cy="457200"/>
+            <a:off x="548640" y="1005840"/>
+            <a:ext cx="8046720" cy="3657600"/>
           </a:xfrm>
           <a:prstGeom prst="rect">
             <a:avLst/>
@@ -1592,223 +1703,110 @@
           <a:ln/>
         </p:spPr>
         <p:txBody>
-          <a:bodyPr wrap="square" rtlCol="0" anchor="ctr"/>
+          <a:bodyPr wrap="square" rtlCol="0" anchor="t"/>
           <a:lstStyle/>
           <a:p>
             <a:pPr marL="342900" indent="-342900">
+              <a:lnSpc>
+                <a:spcPct val="130000"/>
+              </a:lnSpc>
               <a:buSzPct val="100000"/>
               <a:buChar char="•"/>
             </a:pPr>
             <a:r>
               <a:rPr lang="en-US" sz="1400" dirty="0">
                 <a:solidFill>
-                  <a:srgbClr val="334155"/>
-                </a:solidFill>
-                <a:latin typeface="Calibri" pitchFamily="34" charset="0"/>
-                <a:ea typeface="Calibri" pitchFamily="34" charset="-122"/>
-                <a:cs typeface="Calibri" pitchFamily="34" charset="-120"/>
-              </a:rPr>
-              <a:t>1. ENCAPSULATION : l'ADT regroupe données + opérations → la classe fait pareil</a:t>
+                  <a:srgbClr val="E2E8F0"/>
+                </a:solidFill>
+                <a:latin typeface="Calibri" pitchFamily="34" charset="0"/>
+                <a:ea typeface="Calibri" pitchFamily="34" charset="-122"/>
+                <a:cs typeface="Calibri" pitchFamily="34" charset="-120"/>
+              </a:rPr>
+              <a:t>1. Encapsulation : ADT regroupe données + opérations → Classe Java</a:t>
             </a:r>
             <a:endParaRPr lang="en-US" sz="1400" dirty="0"/>
           </a:p>
-        </p:txBody>
-      </p:sp>
-      <p:sp>
-        <p:nvSpPr>
-          <p:cNvPr id="5" name="Text 3"/>
-          <p:cNvSpPr/>
-          <p:nvPr/>
-        </p:nvSpPr>
-        <p:spPr>
-          <a:xfrm>
-            <a:off x="640080" y="1554480"/>
-            <a:ext cx="7772400" cy="457200"/>
-          </a:xfrm>
-          <a:prstGeom prst="rect">
-            <a:avLst/>
-          </a:prstGeom>
-          <a:noFill/>
-          <a:ln/>
-        </p:spPr>
-        <p:txBody>
-          <a:bodyPr wrap="square" rtlCol="0" anchor="ctr"/>
-          <a:lstStyle/>
           <a:p>
             <a:pPr marL="342900" indent="-342900">
+              <a:lnSpc>
+                <a:spcPct val="130000"/>
+              </a:lnSpc>
               <a:buSzPct val="100000"/>
               <a:buChar char="•"/>
             </a:pPr>
             <a:r>
               <a:rPr lang="en-US" sz="1400" dirty="0">
                 <a:solidFill>
-                  <a:srgbClr val="334155"/>
-                </a:solidFill>
-                <a:latin typeface="Calibri" pitchFamily="34" charset="0"/>
-                <a:ea typeface="Calibri" pitchFamily="34" charset="-122"/>
-                <a:cs typeface="Calibri" pitchFamily="34" charset="-120"/>
-              </a:rPr>
-              <a:t>2. ABSTRACTION : l'ADT définit une interface sans implémentation → l'interface Java fait pareil</a:t>
+                  <a:srgbClr val="E2E8F0"/>
+                </a:solidFill>
+                <a:latin typeface="Calibri" pitchFamily="34" charset="0"/>
+                <a:ea typeface="Calibri" pitchFamily="34" charset="-122"/>
+                <a:cs typeface="Calibri" pitchFamily="34" charset="-120"/>
+              </a:rPr>
+              <a:t>2. Abstraction : ADT = interface publique → Interface Java</a:t>
             </a:r>
             <a:endParaRPr lang="en-US" sz="1400" dirty="0"/>
           </a:p>
-        </p:txBody>
-      </p:sp>
-      <p:sp>
-        <p:nvSpPr>
-          <p:cNvPr id="6" name="Text 4"/>
-          <p:cNvSpPr/>
-          <p:nvPr/>
-        </p:nvSpPr>
-        <p:spPr>
-          <a:xfrm>
-            <a:off x="640080" y="2103120"/>
-            <a:ext cx="7772400" cy="457200"/>
-          </a:xfrm>
-          <a:prstGeom prst="rect">
-            <a:avLst/>
-          </a:prstGeom>
-          <a:noFill/>
-          <a:ln/>
-        </p:spPr>
-        <p:txBody>
-          <a:bodyPr wrap="square" rtlCol="0" anchor="ctr"/>
-          <a:lstStyle/>
           <a:p>
             <a:pPr marL="342900" indent="-342900">
+              <a:lnSpc>
+                <a:spcPct val="130000"/>
+              </a:lnSpc>
               <a:buSzPct val="100000"/>
               <a:buChar char="•"/>
             </a:pPr>
             <a:r>
               <a:rPr lang="en-US" sz="1400" dirty="0">
                 <a:solidFill>
-                  <a:srgbClr val="334155"/>
-                </a:solidFill>
-                <a:latin typeface="Calibri" pitchFamily="34" charset="0"/>
-                <a:ea typeface="Calibri" pitchFamily="34" charset="-122"/>
-                <a:cs typeface="Calibri" pitchFamily="34" charset="-120"/>
-              </a:rPr>
-              <a:t>3. MODIFICATION D'ÉTAT : les opérations impératives modifient l'état → les méthodes modifient les attributs</a:t>
+                  <a:srgbClr val="E2E8F0"/>
+                </a:solidFill>
+                <a:latin typeface="Calibri" pitchFamily="34" charset="0"/>
+                <a:ea typeface="Calibri" pitchFamily="34" charset="-122"/>
+                <a:cs typeface="Calibri" pitchFamily="34" charset="-120"/>
+              </a:rPr>
+              <a:t>3. Modification d'état : opérations impératives modifient l'état → Méthodes mutables</a:t>
             </a:r>
             <a:endParaRPr lang="en-US" sz="1400" dirty="0"/>
           </a:p>
-        </p:txBody>
-      </p:sp>
-      <p:sp>
-        <p:nvSpPr>
-          <p:cNvPr id="7" name="Text 5"/>
-          <p:cNvSpPr/>
-          <p:nvPr/>
-        </p:nvSpPr>
-        <p:spPr>
-          <a:xfrm>
-            <a:off x="640080" y="2651760"/>
-            <a:ext cx="7772400" cy="457200"/>
-          </a:xfrm>
-          <a:prstGeom prst="rect">
-            <a:avLst/>
-          </a:prstGeom>
-          <a:noFill/>
-          <a:ln/>
-        </p:spPr>
-        <p:txBody>
-          <a:bodyPr wrap="square" rtlCol="0" anchor="ctr"/>
-          <a:lstStyle/>
           <a:p>
             <a:pPr marL="342900" indent="-342900">
+              <a:lnSpc>
+                <a:spcPct val="130000"/>
+              </a:lnSpc>
               <a:buSzPct val="100000"/>
               <a:buChar char="•"/>
             </a:pPr>
             <a:r>
               <a:rPr lang="en-US" sz="1400" dirty="0">
                 <a:solidFill>
-                  <a:srgbClr val="334155"/>
-                </a:solidFill>
-                <a:latin typeface="Calibri" pitchFamily="34" charset="0"/>
-                <a:ea typeface="Calibri" pitchFamily="34" charset="-122"/>
-                <a:cs typeface="Calibri" pitchFamily="34" charset="-120"/>
-              </a:rPr>
-              <a:t>4. RÉUTILISABILITÉ : un ADT est réutilisable dans différents contextes → les classes sont réutilisables</a:t>
+                  <a:srgbClr val="E2E8F0"/>
+                </a:solidFill>
+                <a:latin typeface="Calibri" pitchFamily="34" charset="0"/>
+                <a:ea typeface="Calibri" pitchFamily="34" charset="-122"/>
+                <a:cs typeface="Calibri" pitchFamily="34" charset="-120"/>
+              </a:rPr>
+              <a:t>4. Réutilisabilité : ADT réutilisable → Classes réutilisables + héritage</a:t>
             </a:r>
             <a:endParaRPr lang="en-US" sz="1400" dirty="0"/>
           </a:p>
-        </p:txBody>
-      </p:sp>
-      <p:sp>
-        <p:nvSpPr>
-          <p:cNvPr id="8" name="Text 6"/>
-          <p:cNvSpPr/>
-          <p:nvPr/>
-        </p:nvSpPr>
-        <p:spPr>
-          <a:xfrm>
-            <a:off x="640080" y="3200400"/>
-            <a:ext cx="7772400" cy="457200"/>
-          </a:xfrm>
-          <a:prstGeom prst="rect">
-            <a:avLst/>
-          </a:prstGeom>
-          <a:noFill/>
-          <a:ln/>
-        </p:spPr>
-        <p:txBody>
-          <a:bodyPr wrap="square" rtlCol="0" anchor="ctr"/>
-          <a:lstStyle/>
           <a:p>
             <a:pPr marL="342900" indent="-342900">
+              <a:lnSpc>
+                <a:spcPct val="130000"/>
+              </a:lnSpc>
               <a:buSzPct val="100000"/>
               <a:buChar char="•"/>
             </a:pPr>
             <a:r>
               <a:rPr lang="en-US" sz="1400" dirty="0">
                 <a:solidFill>
-                  <a:srgbClr val="334155"/>
-                </a:solidFill>
-                <a:latin typeface="Calibri" pitchFamily="34" charset="0"/>
-                <a:ea typeface="Calibri" pitchFamily="34" charset="-122"/>
-                <a:cs typeface="Calibri" pitchFamily="34" charset="-120"/>
-              </a:rPr>
-              <a:t>5. CONTRATS : PRE/POST/INVARIANT de l'ADT → exceptions et tests en POO</a:t>
-            </a:r>
-            <a:endParaRPr lang="en-US" sz="1400" dirty="0"/>
-          </a:p>
-        </p:txBody>
-      </p:sp>
-      <p:sp>
-        <p:nvSpPr>
-          <p:cNvPr id="9" name="Text 7"/>
-          <p:cNvSpPr/>
-          <p:nvPr/>
-        </p:nvSpPr>
-        <p:spPr>
-          <a:xfrm>
-            <a:off x="640080" y="3749040"/>
-            <a:ext cx="7772400" cy="457200"/>
-          </a:xfrm>
-          <a:prstGeom prst="rect">
-            <a:avLst/>
-          </a:prstGeom>
-          <a:noFill/>
-          <a:ln/>
-        </p:spPr>
-        <p:txBody>
-          <a:bodyPr wrap="square" rtlCol="0" anchor="ctr"/>
-          <a:lstStyle/>
-          <a:p>
-            <a:pPr marL="342900" indent="-342900">
-              <a:buSzPct val="100000"/>
-              <a:buChar char="•"/>
-            </a:pPr>
-            <a:r>
-              <a:rPr lang="en-US" sz="1400" dirty="0">
-                <a:solidFill>
-                  <a:srgbClr val="334155"/>
-                </a:solidFill>
-                <a:latin typeface="Calibri" pitchFamily="34" charset="0"/>
-                <a:ea typeface="Calibri" pitchFamily="34" charset="-122"/>
-                <a:cs typeface="Calibri" pitchFamily="34" charset="-120"/>
-              </a:rPr>
-              <a:t>La POO AJOUTE : héritage (extends), polymorphisme (interface), relations entre objets</a:t>
+                  <a:srgbClr val="E2E8F0"/>
+                </a:solidFill>
+                <a:latin typeface="Calibri" pitchFamily="34" charset="0"/>
+                <a:ea typeface="Calibri" pitchFamily="34" charset="-122"/>
+                <a:cs typeface="Calibri" pitchFamily="34" charset="-120"/>
+              </a:rPr>
+              <a:t>5. Contrats : PRE/POST/INVARIANT → Interfaces + Exceptions</a:t>
             </a:r>
             <a:endParaRPr lang="en-US" sz="1400" dirty="0"/>
           </a:p>
@@ -1828,7 +1826,7 @@
     <p:bg>
       <p:bgPr>
         <a:solidFill>
-          <a:srgbClr val="F8FAFC"/>
+          <a:srgbClr val="0B2027"/>
         </a:solidFill>
       </p:bgPr>
     </p:bg>
@@ -1855,13 +1853,13 @@
         <p:spPr>
           <a:xfrm>
             <a:off x="0" y="0"/>
-            <a:ext cx="109728" cy="5143500"/>
+            <a:ext cx="9144000" cy="54864"/>
           </a:xfrm>
           <a:prstGeom prst="rect">
             <a:avLst/>
           </a:prstGeom>
           <a:solidFill>
-            <a:srgbClr val="028090"/>
+            <a:srgbClr val="0891B2"/>
           </a:solidFill>
           <a:ln/>
         </p:spPr>
@@ -1874,7 +1872,7 @@
         </p:nvSpPr>
         <p:spPr>
           <a:xfrm>
-            <a:off x="457200" y="274320"/>
+            <a:off x="548640" y="274320"/>
             <a:ext cx="8229600" cy="548640"/>
           </a:xfrm>
           <a:prstGeom prst="rect">
@@ -1891,17 +1889,17 @@
               <a:buNone/>
             </a:pPr>
             <a:r>
-              <a:rPr lang="en-US" sz="2600" b="1" dirty="0">
-                <a:solidFill>
-                  <a:srgbClr val="1B2A4A"/>
-                </a:solidFill>
-                <a:latin typeface="Trebuchet MS" pitchFamily="34" charset="0"/>
-                <a:ea typeface="Trebuchet MS" pitchFamily="34" charset="-122"/>
-                <a:cs typeface="Trebuchet MS" pitchFamily="34" charset="-120"/>
-              </a:rPr>
-              <a:t>Ce que la POO ajoute aux ADT</a:t>
-            </a:r>
-            <a:endParaRPr lang="en-US" sz="2600" dirty="0"/>
+              <a:rPr lang="en-US" sz="2400" b="1" dirty="0">
+                <a:solidFill>
+                  <a:srgbClr val="FFFFFF"/>
+                </a:solidFill>
+                <a:latin typeface="Calibri" pitchFamily="34" charset="0"/>
+                <a:ea typeface="Calibri" pitchFamily="34" charset="-122"/>
+                <a:cs typeface="Calibri" pitchFamily="34" charset="-120"/>
+              </a:rPr>
+              <a:t>Pré/Post/Error Conditions</a:t>
+            </a:r>
+            <a:endParaRPr lang="en-US" sz="2400" dirty="0"/>
           </a:p>
         </p:txBody>
       </p:sp>
@@ -1913,8 +1911,8 @@
         </p:nvSpPr>
         <p:spPr>
           <a:xfrm>
-            <a:off x="640080" y="1005840"/>
-            <a:ext cx="7772400" cy="457200"/>
+            <a:off x="548640" y="1005840"/>
+            <a:ext cx="3840480" cy="3200400"/>
           </a:xfrm>
           <a:prstGeom prst="rect">
             <a:avLst/>
@@ -1923,7 +1921,7 @@
           <a:ln/>
         </p:spPr>
         <p:txBody>
-          <a:bodyPr wrap="square" rtlCol="0" anchor="ctr"/>
+          <a:bodyPr wrap="square" rtlCol="0" anchor="t"/>
           <a:lstStyle/>
           <a:p>
             <a:pPr marL="342900" indent="-342900">
@@ -1931,59 +1929,113 @@
               <a:buChar char="•"/>
             </a:pPr>
             <a:r>
-              <a:rPr lang="en-US" sz="1400" dirty="0">
-                <a:solidFill>
-                  <a:srgbClr val="334155"/>
-                </a:solidFill>
-                <a:latin typeface="Calibri" pitchFamily="34" charset="0"/>
-                <a:ea typeface="Calibri" pitchFamily="34" charset="-122"/>
-                <a:cs typeface="Calibri" pitchFamily="34" charset="-120"/>
-              </a:rPr>
-              <a:t>HÉRITAGE : class Stack extends AbstractCollection — réutiliser et spécialiser</a:t>
-            </a:r>
-            <a:endParaRPr lang="en-US" sz="1400" dirty="0"/>
-          </a:p>
-        </p:txBody>
-      </p:sp>
-      <p:sp>
-        <p:nvSpPr>
-          <p:cNvPr id="5" name="Text 3"/>
-          <p:cNvSpPr/>
-          <p:nvPr/>
-        </p:nvSpPr>
-        <p:spPr>
-          <a:xfrm>
-            <a:off x="640080" y="1554480"/>
-            <a:ext cx="7772400" cy="457200"/>
-          </a:xfrm>
-          <a:prstGeom prst="rect">
-            <a:avLst/>
-          </a:prstGeom>
-          <a:noFill/>
-          <a:ln/>
-        </p:spPr>
-        <p:txBody>
-          <a:bodyPr wrap="square" rtlCol="0" anchor="ctr"/>
-          <a:lstStyle/>
+              <a:rPr lang="en-US" sz="1300" dirty="0">
+                <a:solidFill>
+                  <a:srgbClr val="E2E8F0"/>
+                </a:solidFill>
+                <a:latin typeface="Calibri" pitchFamily="34" charset="0"/>
+                <a:ea typeface="Calibri" pitchFamily="34" charset="-122"/>
+                <a:cs typeface="Calibri" pitchFamily="34" charset="-120"/>
+              </a:rPr>
+              <a:t>Pré-condition : ce qui DOIT être vrai AVANT l'appel</a:t>
+            </a:r>
+            <a:endParaRPr lang="en-US" sz="1300" dirty="0"/>
+          </a:p>
           <a:p>
             <a:pPr marL="342900" indent="-342900">
               <a:buSzPct val="100000"/>
               <a:buChar char="•"/>
             </a:pPr>
             <a:r>
-              <a:rPr lang="en-US" sz="1400" dirty="0">
-                <a:solidFill>
-                  <a:srgbClr val="334155"/>
-                </a:solidFill>
-                <a:latin typeface="Calibri" pitchFamily="34" charset="0"/>
-                <a:ea typeface="Calibri" pitchFamily="34" charset="-122"/>
-                <a:cs typeface="Calibri" pitchFamily="34" charset="-120"/>
-              </a:rPr>
-              <a:t>POLYMORPHISME : List&lt;E&gt; list = new ArrayList&lt;&gt;() OU new LinkedList&lt;&gt;() — même interface, implémentation différente</a:t>
-            </a:r>
-            <a:endParaRPr lang="en-US" sz="1400" dirty="0"/>
-          </a:p>
-        </p:txBody>
+              <a:rPr lang="en-US" sz="1300" dirty="0">
+                <a:solidFill>
+                  <a:srgbClr val="E2E8F0"/>
+                </a:solidFill>
+                <a:latin typeface="Calibri" pitchFamily="34" charset="0"/>
+                <a:ea typeface="Calibri" pitchFamily="34" charset="-122"/>
+                <a:cs typeface="Calibri" pitchFamily="34" charset="-120"/>
+              </a:rPr>
+              <a:t>Post-condition : ce qui est GARANTI APRÈS l'appel</a:t>
+            </a:r>
+            <a:endParaRPr lang="en-US" sz="1300" dirty="0"/>
+          </a:p>
+          <a:p>
+            <a:pPr marL="342900" indent="-342900">
+              <a:buSzPct val="100000"/>
+              <a:buChar char="•"/>
+            </a:pPr>
+            <a:r>
+              <a:rPr lang="en-US" sz="1300" dirty="0">
+                <a:solidFill>
+                  <a:srgbClr val="E2E8F0"/>
+                </a:solidFill>
+                <a:latin typeface="Calibri" pitchFamily="34" charset="0"/>
+                <a:ea typeface="Calibri" pitchFamily="34" charset="-122"/>
+                <a:cs typeface="Calibri" pitchFamily="34" charset="-120"/>
+              </a:rPr>
+              <a:t>Error-condition : ce qui se passe quand les PRE sont VIOLÉES</a:t>
+            </a:r>
+            <a:endParaRPr lang="en-US" sz="1300" dirty="0"/>
+          </a:p>
+          <a:p>
+            <a:pPr marL="342900" indent="-342900">
+              <a:buSzPct val="100000"/>
+              <a:buChar char="•"/>
+            </a:pPr>
+            <a:r>
+              <a:rPr lang="en-US" sz="1300" dirty="0">
+                <a:solidFill>
+                  <a:srgbClr val="E2E8F0"/>
+                </a:solidFill>
+                <a:latin typeface="Calibri" pitchFamily="34" charset="0"/>
+                <a:ea typeface="Calibri" pitchFamily="34" charset="-122"/>
+                <a:cs typeface="Calibri" pitchFamily="34" charset="-120"/>
+              </a:rPr>
+              <a:t>En Java : error-condition → throw Exception</a:t>
+            </a:r>
+            <a:endParaRPr lang="en-US" sz="1300" dirty="0"/>
+          </a:p>
+          <a:p>
+            <a:pPr marL="342900" indent="-342900">
+              <a:buSzPct val="100000"/>
+              <a:buChar char="•"/>
+            </a:pPr>
+            <a:r>
+              <a:rPr lang="en-US" sz="1300" dirty="0">
+                <a:solidFill>
+                  <a:srgbClr val="E2E8F0"/>
+                </a:solidFill>
+                <a:latin typeface="Calibri" pitchFamily="34" charset="0"/>
+                <a:ea typeface="Calibri" pitchFamily="34" charset="-122"/>
+                <a:cs typeface="Calibri" pitchFamily="34" charset="-120"/>
+              </a:rPr>
+              <a:t>try/catch = la gestion des error-conditions</a:t>
+            </a:r>
+            <a:endParaRPr lang="en-US" sz="1300" dirty="0"/>
+          </a:p>
+        </p:txBody>
+      </p:sp>
+      <p:sp>
+        <p:nvSpPr>
+          <p:cNvPr id="5" name="Shape 3"/>
+          <p:cNvSpPr/>
+          <p:nvPr/>
+        </p:nvSpPr>
+        <p:spPr>
+          <a:xfrm>
+            <a:off x="4754880" y="1005840"/>
+            <a:ext cx="4023360" cy="3200400"/>
+          </a:xfrm>
+          <a:prstGeom prst="roundRect">
+            <a:avLst>
+              <a:gd name="adj" fmla="val 2857"/>
+            </a:avLst>
+          </a:prstGeom>
+          <a:solidFill>
+            <a:srgbClr val="0D1117"/>
+          </a:solidFill>
+          <a:ln/>
+        </p:spPr>
       </p:sp>
       <p:sp>
         <p:nvSpPr>
@@ -1993,8 +2045,8 @@
         </p:nvSpPr>
         <p:spPr>
           <a:xfrm>
-            <a:off x="640080" y="2103120"/>
-            <a:ext cx="7772400" cy="457200"/>
+            <a:off x="4937760" y="1143000"/>
+            <a:ext cx="3657600" cy="2926080"/>
           </a:xfrm>
           <a:prstGeom prst="rect">
             <a:avLst/>
@@ -2003,145 +2055,206 @@
           <a:ln/>
         </p:spPr>
         <p:txBody>
-          <a:bodyPr wrap="square" rtlCol="0" anchor="ctr"/>
-          <a:lstStyle/>
-          <a:p>
-            <a:pPr marL="342900" indent="-342900">
-              <a:buSzPct val="100000"/>
-              <a:buChar char="•"/>
-            </a:pPr>
-            <a:r>
-              <a:rPr lang="en-US" sz="1400" dirty="0">
-                <a:solidFill>
-                  <a:srgbClr val="334155"/>
-                </a:solidFill>
-                <a:latin typeface="Calibri" pitchFamily="34" charset="0"/>
-                <a:ea typeface="Calibri" pitchFamily="34" charset="-122"/>
-                <a:cs typeface="Calibri" pitchFamily="34" charset="-120"/>
-              </a:rPr>
-              <a:t>COMPOSITION : un objet contient d'autres objets — construire des structures complexes</a:t>
-            </a:r>
-            <a:endParaRPr lang="en-US" sz="1400" dirty="0"/>
-          </a:p>
-        </p:txBody>
-      </p:sp>
-      <p:sp>
-        <p:nvSpPr>
-          <p:cNvPr id="7" name="Text 5"/>
-          <p:cNvSpPr/>
-          <p:nvPr/>
-        </p:nvSpPr>
-        <p:spPr>
-          <a:xfrm>
-            <a:off x="640080" y="2651760"/>
-            <a:ext cx="7772400" cy="457200"/>
-          </a:xfrm>
-          <a:prstGeom prst="rect">
-            <a:avLst/>
-          </a:prstGeom>
-          <a:noFill/>
-          <a:ln/>
-        </p:spPr>
-        <p:txBody>
-          <a:bodyPr wrap="square" rtlCol="0" anchor="ctr"/>
-          <a:lstStyle/>
-          <a:p>
-            <a:pPr marL="342900" indent="-342900">
-              <a:buSzPct val="100000"/>
-              <a:buChar char="•"/>
-            </a:pPr>
-            <a:r>
-              <a:rPr lang="en-US" sz="1400" dirty="0">
-                <a:solidFill>
-                  <a:srgbClr val="334155"/>
-                </a:solidFill>
-                <a:latin typeface="Calibri" pitchFamily="34" charset="0"/>
-                <a:ea typeface="Calibri" pitchFamily="34" charset="-122"/>
-                <a:cs typeface="Calibri" pitchFamily="34" charset="-120"/>
-              </a:rPr>
-              <a:t>IDENTITÉ : chaque objet a une identité unique (référence en mémoire)</a:t>
-            </a:r>
-            <a:endParaRPr lang="en-US" sz="1400" dirty="0"/>
-          </a:p>
-        </p:txBody>
-      </p:sp>
-      <p:sp>
-        <p:nvSpPr>
-          <p:cNvPr id="8" name="Text 6"/>
-          <p:cNvSpPr/>
-          <p:nvPr/>
-        </p:nvSpPr>
-        <p:spPr>
-          <a:xfrm>
-            <a:off x="640080" y="3200400"/>
-            <a:ext cx="7772400" cy="457200"/>
-          </a:xfrm>
-          <a:prstGeom prst="rect">
-            <a:avLst/>
-          </a:prstGeom>
-          <a:noFill/>
-          <a:ln/>
-        </p:spPr>
-        <p:txBody>
-          <a:bodyPr wrap="square" rtlCol="0" anchor="ctr"/>
-          <a:lstStyle/>
-          <a:p>
-            <a:pPr marL="342900" indent="-342900">
-              <a:buSzPct val="100000"/>
-              <a:buChar char="•"/>
-            </a:pPr>
-            <a:r>
-              <a:rPr lang="en-US" sz="1400" dirty="0">
-                <a:solidFill>
-                  <a:srgbClr val="334155"/>
-                </a:solidFill>
-                <a:latin typeface="Calibri" pitchFamily="34" charset="0"/>
-                <a:ea typeface="Calibri" pitchFamily="34" charset="-122"/>
-                <a:cs typeface="Calibri" pitchFamily="34" charset="-120"/>
-              </a:rPr>
-              <a:t>Les ADT sont la FONDATION, la POO est la MAISON construite dessus</a:t>
-            </a:r>
-            <a:endParaRPr lang="en-US" sz="1400" dirty="0"/>
-          </a:p>
-        </p:txBody>
-      </p:sp>
-      <p:sp>
-        <p:nvSpPr>
-          <p:cNvPr id="9" name="Text 7"/>
-          <p:cNvSpPr/>
-          <p:nvPr/>
-        </p:nvSpPr>
-        <p:spPr>
-          <a:xfrm>
-            <a:off x="640080" y="3749040"/>
-            <a:ext cx="7772400" cy="457200"/>
-          </a:xfrm>
-          <a:prstGeom prst="rect">
-            <a:avLst/>
-          </a:prstGeom>
-          <a:noFill/>
-          <a:ln/>
-        </p:spPr>
-        <p:txBody>
-          <a:bodyPr wrap="square" rtlCol="0" anchor="ctr"/>
-          <a:lstStyle/>
-          <a:p>
-            <a:pPr marL="342900" indent="-342900">
-              <a:buSzPct val="100000"/>
-              <a:buChar char="•"/>
-            </a:pPr>
-            <a:r>
-              <a:rPr lang="en-US" sz="1400" dirty="0">
-                <a:solidFill>
-                  <a:srgbClr val="334155"/>
-                </a:solidFill>
-                <a:latin typeface="Calibri" pitchFamily="34" charset="0"/>
-                <a:ea typeface="Calibri" pitchFamily="34" charset="-122"/>
-                <a:cs typeface="Calibri" pitchFamily="34" charset="-120"/>
-              </a:rPr>
-              <a:t>Sans les concepts des ADT (encapsulation, abstraction, contrats), la POO n'existerait pas</a:t>
-            </a:r>
-            <a:endParaRPr lang="en-US" sz="1400" dirty="0"/>
+          <a:bodyPr wrap="square" rtlCol="0" anchor="t"/>
+          <a:lstStyle/>
+          <a:p>
+            <a:pPr indent="0" marL="0">
+              <a:buNone/>
+            </a:pPr>
+            <a:r>
+              <a:rPr lang="en-US" sz="1000" dirty="0">
+                <a:solidFill>
+                  <a:srgbClr val="A5F3FC"/>
+                </a:solidFill>
+                <a:latin typeface="Consolas" pitchFamily="34" charset="0"/>
+                <a:ea typeface="Consolas" pitchFamily="34" charset="-122"/>
+                <a:cs typeface="Consolas" pitchFamily="34" charset="-120"/>
+              </a:rPr>
+              <a:t>// Pré-condition</a:t>
+            </a:r>
+            <a:endParaRPr lang="en-US" sz="1000" dirty="0"/>
+          </a:p>
+          <a:p>
+            <a:pPr indent="0" marL="0">
+              <a:buNone/>
+            </a:pPr>
+            <a:r>
+              <a:rPr lang="en-US" sz="1000" dirty="0">
+                <a:solidFill>
+                  <a:srgbClr val="A5F3FC"/>
+                </a:solidFill>
+                <a:latin typeface="Consolas" pitchFamily="34" charset="0"/>
+                <a:ea typeface="Consolas" pitchFamily="34" charset="-122"/>
+                <a:cs typeface="Consolas" pitchFamily="34" charset="-120"/>
+              </a:rPr>
+              <a:t>if (isEmpty())</a:t>
+            </a:r>
+            <a:endParaRPr lang="en-US" sz="1000" dirty="0"/>
+          </a:p>
+          <a:p>
+            <a:pPr indent="0" marL="0">
+              <a:buNone/>
+            </a:pPr>
+            <a:r>
+              <a:rPr lang="en-US" sz="1000" dirty="0">
+                <a:solidFill>
+                  <a:srgbClr val="A5F3FC"/>
+                </a:solidFill>
+                <a:latin typeface="Consolas" pitchFamily="34" charset="0"/>
+                <a:ea typeface="Consolas" pitchFamily="34" charset="-122"/>
+                <a:cs typeface="Consolas" pitchFamily="34" charset="-120"/>
+              </a:rPr>
+              <a:t>    throw new EmptyStackException();</a:t>
+            </a:r>
+            <a:endParaRPr lang="en-US" sz="1000" dirty="0"/>
+          </a:p>
+          <a:p>
+            <a:pPr indent="0" marL="0">
+              <a:buNone/>
+            </a:pPr>
+            <a:endParaRPr lang="en-US" sz="1000" dirty="0"/>
+          </a:p>
+          <a:p>
+            <a:pPr indent="0" marL="0">
+              <a:buNone/>
+            </a:pPr>
+            <a:r>
+              <a:rPr lang="en-US" sz="1000" dirty="0">
+                <a:solidFill>
+                  <a:srgbClr val="A5F3FC"/>
+                </a:solidFill>
+                <a:latin typeface="Consolas" pitchFamily="34" charset="0"/>
+                <a:ea typeface="Consolas" pitchFamily="34" charset="-122"/>
+                <a:cs typeface="Consolas" pitchFamily="34" charset="-120"/>
+              </a:rPr>
+              <a:t>// Error-condition = violation de PRE</a:t>
+            </a:r>
+            <a:endParaRPr lang="en-US" sz="1000" dirty="0"/>
+          </a:p>
+          <a:p>
+            <a:pPr indent="0" marL="0">
+              <a:buNone/>
+            </a:pPr>
+            <a:r>
+              <a:rPr lang="en-US" sz="1000" dirty="0">
+                <a:solidFill>
+                  <a:srgbClr val="A5F3FC"/>
+                </a:solidFill>
+                <a:latin typeface="Consolas" pitchFamily="34" charset="0"/>
+                <a:ea typeface="Consolas" pitchFamily="34" charset="-122"/>
+                <a:cs typeface="Consolas" pitchFamily="34" charset="-120"/>
+              </a:rPr>
+              <a:t>try {</a:t>
+            </a:r>
+            <a:endParaRPr lang="en-US" sz="1000" dirty="0"/>
+          </a:p>
+          <a:p>
+            <a:pPr indent="0" marL="0">
+              <a:buNone/>
+            </a:pPr>
+            <a:r>
+              <a:rPr lang="en-US" sz="1000" dirty="0">
+                <a:solidFill>
+                  <a:srgbClr val="A5F3FC"/>
+                </a:solidFill>
+                <a:latin typeface="Consolas" pitchFamily="34" charset="0"/>
+                <a:ea typeface="Consolas" pitchFamily="34" charset="-122"/>
+                <a:cs typeface="Consolas" pitchFamily="34" charset="-120"/>
+              </a:rPr>
+              <a:t>    stack.pop();</a:t>
+            </a:r>
+            <a:endParaRPr lang="en-US" sz="1000" dirty="0"/>
+          </a:p>
+          <a:p>
+            <a:pPr indent="0" marL="0">
+              <a:buNone/>
+            </a:pPr>
+            <a:r>
+              <a:rPr lang="en-US" sz="1000" dirty="0">
+                <a:solidFill>
+                  <a:srgbClr val="A5F3FC"/>
+                </a:solidFill>
+                <a:latin typeface="Consolas" pitchFamily="34" charset="0"/>
+                <a:ea typeface="Consolas" pitchFamily="34" charset="-122"/>
+                <a:cs typeface="Consolas" pitchFamily="34" charset="-120"/>
+              </a:rPr>
+              <a:t>} catch (EmptyStackException e) {</a:t>
+            </a:r>
+            <a:endParaRPr lang="en-US" sz="1000" dirty="0"/>
+          </a:p>
+          <a:p>
+            <a:pPr indent="0" marL="0">
+              <a:buNone/>
+            </a:pPr>
+            <a:r>
+              <a:rPr lang="en-US" sz="1000" dirty="0">
+                <a:solidFill>
+                  <a:srgbClr val="A5F3FC"/>
+                </a:solidFill>
+                <a:latin typeface="Consolas" pitchFamily="34" charset="0"/>
+                <a:ea typeface="Consolas" pitchFamily="34" charset="-122"/>
+                <a:cs typeface="Consolas" pitchFamily="34" charset="-120"/>
+              </a:rPr>
+              <a:t>    System.out.println("Erreur !");</a:t>
+            </a:r>
+            <a:endParaRPr lang="en-US" sz="1000" dirty="0"/>
+          </a:p>
+          <a:p>
+            <a:pPr indent="0" marL="0">
+              <a:buNone/>
+            </a:pPr>
+            <a:r>
+              <a:rPr lang="en-US" sz="1000" dirty="0">
+                <a:solidFill>
+                  <a:srgbClr val="A5F3FC"/>
+                </a:solidFill>
+                <a:latin typeface="Consolas" pitchFamily="34" charset="0"/>
+                <a:ea typeface="Consolas" pitchFamily="34" charset="-122"/>
+                <a:cs typeface="Consolas" pitchFamily="34" charset="-120"/>
+              </a:rPr>
+              <a:t>}</a:t>
+            </a:r>
+            <a:endParaRPr lang="en-US" sz="1000" dirty="0"/>
+          </a:p>
+          <a:p>
+            <a:pPr indent="0" marL="0">
+              <a:buNone/>
+            </a:pPr>
+            <a:endParaRPr lang="en-US" sz="1000" dirty="0"/>
+          </a:p>
+          <a:p>
+            <a:pPr indent="0" marL="0">
+              <a:buNone/>
+            </a:pPr>
+            <a:r>
+              <a:rPr lang="en-US" sz="1000" dirty="0">
+                <a:solidFill>
+                  <a:srgbClr val="A5F3FC"/>
+                </a:solidFill>
+                <a:latin typeface="Consolas" pitchFamily="34" charset="0"/>
+                <a:ea typeface="Consolas" pitchFamily="34" charset="-122"/>
+                <a:cs typeface="Consolas" pitchFamily="34" charset="-120"/>
+              </a:rPr>
+              <a:t>// Post-condition vérifiée par le test</a:t>
+            </a:r>
+            <a:endParaRPr lang="en-US" sz="1000" dirty="0"/>
+          </a:p>
+          <a:p>
+            <a:pPr indent="0" marL="0">
+              <a:buNone/>
+            </a:pPr>
+            <a:r>
+              <a:rPr lang="en-US" sz="1000" dirty="0">
+                <a:solidFill>
+                  <a:srgbClr val="A5F3FC"/>
+                </a:solidFill>
+                <a:latin typeface="Consolas" pitchFamily="34" charset="0"/>
+                <a:ea typeface="Consolas" pitchFamily="34" charset="-122"/>
+                <a:cs typeface="Consolas" pitchFamily="34" charset="-120"/>
+              </a:rPr>
+              <a:t>assertEquals(oldSize - 1, stack.size());</a:t>
+            </a:r>
+            <a:endParaRPr lang="en-US" sz="1000" dirty="0"/>
           </a:p>
         </p:txBody>
       </p:sp>
@@ -2159,7 +2272,7 @@
     <p:bg>
       <p:bgPr>
         <a:solidFill>
-          <a:srgbClr val="F8FAFC"/>
+          <a:srgbClr val="0B2027"/>
         </a:solidFill>
       </p:bgPr>
     </p:bg>
@@ -2186,13 +2299,13 @@
         <p:spPr>
           <a:xfrm>
             <a:off x="0" y="0"/>
-            <a:ext cx="109728" cy="5143500"/>
+            <a:ext cx="9144000" cy="54864"/>
           </a:xfrm>
           <a:prstGeom prst="rect">
             <a:avLst/>
           </a:prstGeom>
           <a:solidFill>
-            <a:srgbClr val="028090"/>
+            <a:srgbClr val="0891B2"/>
           </a:solidFill>
           <a:ln/>
         </p:spPr>
@@ -2205,7 +2318,7 @@
         </p:nvSpPr>
         <p:spPr>
           <a:xfrm>
-            <a:off x="457200" y="274320"/>
+            <a:off x="548640" y="274320"/>
             <a:ext cx="8229600" cy="548640"/>
           </a:xfrm>
           <a:prstGeom prst="rect">
@@ -2222,17 +2335,17 @@
               <a:buNone/>
             </a:pPr>
             <a:r>
-              <a:rPr lang="en-US" sz="2600" b="1" dirty="0">
-                <a:solidFill>
-                  <a:srgbClr val="1B2A4A"/>
-                </a:solidFill>
-                <a:latin typeface="Trebuchet MS" pitchFamily="34" charset="0"/>
-                <a:ea typeface="Trebuchet MS" pitchFamily="34" charset="-122"/>
-                <a:cs typeface="Trebuchet MS" pitchFamily="34" charset="-120"/>
-              </a:rPr>
-              <a:t>Structure d'argumentation pour le devoir</a:t>
-            </a:r>
-            <a:endParaRPr lang="en-US" sz="2600" dirty="0"/>
+              <a:rPr lang="en-US" sz="2400" b="1" dirty="0">
+                <a:solidFill>
+                  <a:srgbClr val="FFFFFF"/>
+                </a:solidFill>
+                <a:latin typeface="Calibri" pitchFamily="34" charset="0"/>
+                <a:ea typeface="Calibri" pitchFamily="34" charset="-122"/>
+                <a:cs typeface="Calibri" pitchFamily="34" charset="-120"/>
+              </a:rPr>
+              <a:t>De l'ADT à Java : traduction directe</a:t>
+            </a:r>
+            <a:endParaRPr lang="en-US" sz="2400" dirty="0"/>
           </a:p>
         </p:txBody>
       </p:sp>
@@ -2244,8 +2357,8 @@
         </p:nvSpPr>
         <p:spPr>
           <a:xfrm>
-            <a:off x="640080" y="1005840"/>
-            <a:ext cx="7772400" cy="457200"/>
+            <a:off x="548640" y="1005840"/>
+            <a:ext cx="8046720" cy="3657600"/>
           </a:xfrm>
           <a:prstGeom prst="rect">
             <a:avLst/>
@@ -2254,223 +2367,110 @@
           <a:ln/>
         </p:spPr>
         <p:txBody>
-          <a:bodyPr wrap="square" rtlCol="0" anchor="ctr"/>
+          <a:bodyPr wrap="square" rtlCol="0" anchor="t"/>
           <a:lstStyle/>
           <a:p>
             <a:pPr marL="342900" indent="-342900">
+              <a:lnSpc>
+                <a:spcPct val="130000"/>
+              </a:lnSpc>
               <a:buSzPct val="100000"/>
               <a:buChar char="•"/>
             </a:pPr>
             <a:r>
               <a:rPr lang="en-US" sz="1400" dirty="0">
                 <a:solidFill>
-                  <a:srgbClr val="334155"/>
-                </a:solidFill>
-                <a:latin typeface="Calibri" pitchFamily="34" charset="0"/>
-                <a:ea typeface="Calibri" pitchFamily="34" charset="-122"/>
-                <a:cs typeface="Calibri" pitchFamily="34" charset="-120"/>
-              </a:rPr>
-              <a:t>Introduction : Poser la thèse — les ADT impératifs SONT la base de la POO</a:t>
+                  <a:srgbClr val="E2E8F0"/>
+                </a:solidFill>
+                <a:latin typeface="Calibri" pitchFamily="34" charset="0"/>
+                <a:ea typeface="Calibri" pitchFamily="34" charset="-122"/>
+                <a:cs typeface="Calibri" pitchFamily="34" charset="-120"/>
+              </a:rPr>
+              <a:t>ADT Stack&lt;E&gt; → class Stack&lt;E&gt; ou interface Stack&lt;E&gt;</a:t>
             </a:r>
             <a:endParaRPr lang="en-US" sz="1400" dirty="0"/>
           </a:p>
-        </p:txBody>
-      </p:sp>
-      <p:sp>
-        <p:nvSpPr>
-          <p:cNvPr id="5" name="Text 3"/>
-          <p:cNvSpPr/>
-          <p:nvPr/>
-        </p:nvSpPr>
-        <p:spPr>
-          <a:xfrm>
-            <a:off x="640080" y="1554480"/>
-            <a:ext cx="7772400" cy="457200"/>
-          </a:xfrm>
-          <a:prstGeom prst="rect">
-            <a:avLst/>
-          </a:prstGeom>
-          <a:noFill/>
-          <a:ln/>
-        </p:spPr>
-        <p:txBody>
-          <a:bodyPr wrap="square" rtlCol="0" anchor="ctr"/>
-          <a:lstStyle/>
           <a:p>
             <a:pPr marL="342900" indent="-342900">
+              <a:lnSpc>
+                <a:spcPct val="130000"/>
+              </a:lnSpc>
               <a:buSzPct val="100000"/>
               <a:buChar char="•"/>
             </a:pPr>
             <a:r>
               <a:rPr lang="en-US" sz="1400" dirty="0">
                 <a:solidFill>
-                  <a:srgbClr val="334155"/>
-                </a:solidFill>
-                <a:latin typeface="Calibri" pitchFamily="34" charset="0"/>
-                <a:ea typeface="Calibri" pitchFamily="34" charset="-122"/>
-                <a:cs typeface="Calibri" pitchFamily="34" charset="-120"/>
-              </a:rPr>
-              <a:t>Argument 1 : Encapsulation (ADT → classe). Exemple concret en Java.</a:t>
+                  <a:srgbClr val="E2E8F0"/>
+                </a:solidFill>
+                <a:latin typeface="Calibri" pitchFamily="34" charset="0"/>
+                <a:ea typeface="Calibri" pitchFamily="34" charset="-122"/>
+                <a:cs typeface="Calibri" pitchFamily="34" charset="-120"/>
+              </a:rPr>
+              <a:t>OPERATION push(e) → public void push(E e)</a:t>
             </a:r>
             <a:endParaRPr lang="en-US" sz="1400" dirty="0"/>
           </a:p>
-        </p:txBody>
-      </p:sp>
-      <p:sp>
-        <p:nvSpPr>
-          <p:cNvPr id="6" name="Text 4"/>
-          <p:cNvSpPr/>
-          <p:nvPr/>
-        </p:nvSpPr>
-        <p:spPr>
-          <a:xfrm>
-            <a:off x="640080" y="2103120"/>
-            <a:ext cx="7772400" cy="457200"/>
-          </a:xfrm>
-          <a:prstGeom prst="rect">
-            <a:avLst/>
-          </a:prstGeom>
-          <a:noFill/>
-          <a:ln/>
-        </p:spPr>
-        <p:txBody>
-          <a:bodyPr wrap="square" rtlCol="0" anchor="ctr"/>
-          <a:lstStyle/>
           <a:p>
             <a:pPr marL="342900" indent="-342900">
+              <a:lnSpc>
+                <a:spcPct val="130000"/>
+              </a:lnSpc>
               <a:buSzPct val="100000"/>
               <a:buChar char="•"/>
             </a:pPr>
             <a:r>
               <a:rPr lang="en-US" sz="1400" dirty="0">
                 <a:solidFill>
-                  <a:srgbClr val="334155"/>
-                </a:solidFill>
-                <a:latin typeface="Calibri" pitchFamily="34" charset="0"/>
-                <a:ea typeface="Calibri" pitchFamily="34" charset="-122"/>
-                <a:cs typeface="Calibri" pitchFamily="34" charset="-120"/>
-              </a:rPr>
-              <a:t>Argument 2 : Abstraction et interface (ADT spec → interface Java). Exemple.</a:t>
+                  <a:srgbClr val="E2E8F0"/>
+                </a:solidFill>
+                <a:latin typeface="Calibri" pitchFamily="34" charset="0"/>
+                <a:ea typeface="Calibri" pitchFamily="34" charset="-122"/>
+                <a:cs typeface="Calibri" pitchFamily="34" charset="-120"/>
+              </a:rPr>
+              <a:t>PRE: !isEmpty() → if (isEmpty()) throw new Exception</a:t>
             </a:r>
             <a:endParaRPr lang="en-US" sz="1400" dirty="0"/>
           </a:p>
-        </p:txBody>
-      </p:sp>
-      <p:sp>
-        <p:nvSpPr>
-          <p:cNvPr id="7" name="Text 5"/>
-          <p:cNvSpPr/>
-          <p:nvPr/>
-        </p:nvSpPr>
-        <p:spPr>
-          <a:xfrm>
-            <a:off x="640080" y="2651760"/>
-            <a:ext cx="7772400" cy="457200"/>
-          </a:xfrm>
-          <a:prstGeom prst="rect">
-            <a:avLst/>
-          </a:prstGeom>
-          <a:noFill/>
-          <a:ln/>
-        </p:spPr>
-        <p:txBody>
-          <a:bodyPr wrap="square" rtlCol="0" anchor="ctr"/>
-          <a:lstStyle/>
           <a:p>
             <a:pPr marL="342900" indent="-342900">
+              <a:lnSpc>
+                <a:spcPct val="130000"/>
+              </a:lnSpc>
               <a:buSzPct val="100000"/>
               <a:buChar char="•"/>
             </a:pPr>
             <a:r>
               <a:rPr lang="en-US" sz="1400" dirty="0">
                 <a:solidFill>
-                  <a:srgbClr val="334155"/>
-                </a:solidFill>
-                <a:latin typeface="Calibri" pitchFamily="34" charset="0"/>
-                <a:ea typeface="Calibri" pitchFamily="34" charset="-122"/>
-                <a:cs typeface="Calibri" pitchFamily="34" charset="-120"/>
-              </a:rPr>
-              <a:t>Argument 3 : Contrats et fiabilité (PRE/POST → exceptions). Exemple.</a:t>
+                  <a:srgbClr val="E2E8F0"/>
+                </a:solidFill>
+                <a:latin typeface="Calibri" pitchFamily="34" charset="0"/>
+                <a:ea typeface="Calibri" pitchFamily="34" charset="-122"/>
+                <a:cs typeface="Calibri" pitchFamily="34" charset="-120"/>
+              </a:rPr>
+              <a:t>POST: size += 1 → garanti par l'implémentation</a:t>
             </a:r>
             <a:endParaRPr lang="en-US" sz="1400" dirty="0"/>
           </a:p>
-        </p:txBody>
-      </p:sp>
-      <p:sp>
-        <p:nvSpPr>
-          <p:cNvPr id="8" name="Text 6"/>
-          <p:cNvSpPr/>
-          <p:nvPr/>
-        </p:nvSpPr>
-        <p:spPr>
-          <a:xfrm>
-            <a:off x="640080" y="3200400"/>
-            <a:ext cx="7772400" cy="457200"/>
-          </a:xfrm>
-          <a:prstGeom prst="rect">
-            <a:avLst/>
-          </a:prstGeom>
-          <a:noFill/>
-          <a:ln/>
-        </p:spPr>
-        <p:txBody>
-          <a:bodyPr wrap="square" rtlCol="0" anchor="ctr"/>
-          <a:lstStyle/>
           <a:p>
             <a:pPr marL="342900" indent="-342900">
+              <a:lnSpc>
+                <a:spcPct val="130000"/>
+              </a:lnSpc>
               <a:buSzPct val="100000"/>
               <a:buChar char="•"/>
             </a:pPr>
             <a:r>
               <a:rPr lang="en-US" sz="1400" dirty="0">
                 <a:solidFill>
-                  <a:srgbClr val="334155"/>
-                </a:solidFill>
-                <a:latin typeface="Calibri" pitchFamily="34" charset="0"/>
-                <a:ea typeface="Calibri" pitchFamily="34" charset="-122"/>
-                <a:cs typeface="Calibri" pitchFamily="34" charset="-120"/>
-              </a:rPr>
-              <a:t>Discussion : ce que la POO ajoute (héritage, polymorphisme) — extension, pas remplacement</a:t>
-            </a:r>
-            <a:endParaRPr lang="en-US" sz="1400" dirty="0"/>
-          </a:p>
-        </p:txBody>
-      </p:sp>
-      <p:sp>
-        <p:nvSpPr>
-          <p:cNvPr id="9" name="Text 7"/>
-          <p:cNvSpPr/>
-          <p:nvPr/>
-        </p:nvSpPr>
-        <p:spPr>
-          <a:xfrm>
-            <a:off x="640080" y="3749040"/>
-            <a:ext cx="7772400" cy="457200"/>
-          </a:xfrm>
-          <a:prstGeom prst="rect">
-            <a:avLst/>
-          </a:prstGeom>
-          <a:noFill/>
-          <a:ln/>
-        </p:spPr>
-        <p:txBody>
-          <a:bodyPr wrap="square" rtlCol="0" anchor="ctr"/>
-          <a:lstStyle/>
-          <a:p>
-            <a:pPr marL="342900" indent="-342900">
-              <a:buSzPct val="100000"/>
-              <a:buChar char="•"/>
-            </a:pPr>
-            <a:r>
-              <a:rPr lang="en-US" sz="1400" dirty="0">
-                <a:solidFill>
-                  <a:srgbClr val="334155"/>
-                </a:solidFill>
-                <a:latin typeface="Calibri" pitchFamily="34" charset="0"/>
-                <a:ea typeface="Calibri" pitchFamily="34" charset="-122"/>
-                <a:cs typeface="Calibri" pitchFamily="34" charset="-120"/>
-              </a:rPr>
-              <a:t>Conclusion : les ADT impératifs ont posé les fondations conceptuelles de la POO</a:t>
+                  <a:srgbClr val="E2E8F0"/>
+                </a:solidFill>
+                <a:latin typeface="Calibri" pitchFamily="34" charset="0"/>
+                <a:ea typeface="Calibri" pitchFamily="34" charset="-122"/>
+                <a:cs typeface="Calibri" pitchFamily="34" charset="-120"/>
+              </a:rPr>
+              <a:t>INVARIANT → vérifié par les tests JUnit</a:t>
             </a:r>
             <a:endParaRPr lang="en-US" sz="1400" dirty="0"/>
           </a:p>
@@ -2490,7 +2490,7 @@
     <p:bg>
       <p:bgPr>
         <a:solidFill>
-          <a:srgbClr val="0F172A"/>
+          <a:srgbClr val="0B2027"/>
         </a:solidFill>
       </p:bgPr>
     </p:bg>
@@ -2517,13 +2517,13 @@
         <p:spPr>
           <a:xfrm>
             <a:off x="0" y="0"/>
-            <a:ext cx="9144000" cy="73152"/>
+            <a:ext cx="9144000" cy="54864"/>
           </a:xfrm>
           <a:prstGeom prst="rect">
             <a:avLst/>
           </a:prstGeom>
           <a:solidFill>
-            <a:srgbClr val="DC2626"/>
+            <a:srgbClr val="0891B2"/>
           </a:solidFill>
           <a:ln/>
         </p:spPr>
@@ -2536,8 +2536,8 @@
         </p:nvSpPr>
         <p:spPr>
           <a:xfrm>
-            <a:off x="457200" y="182880"/>
-            <a:ext cx="7315200" cy="457200"/>
+            <a:off x="548640" y="274320"/>
+            <a:ext cx="8229600" cy="548640"/>
           </a:xfrm>
           <a:prstGeom prst="rect">
             <a:avLst/>
@@ -2546,24 +2546,24 @@
           <a:ln/>
         </p:spPr>
         <p:txBody>
-          <a:bodyPr wrap="square" rtlCol="0" anchor="ctr"/>
+          <a:bodyPr wrap="square" lIns="0" tIns="0" rIns="0" bIns="0" rtlCol="0" anchor="ctr"/>
           <a:lstStyle/>
           <a:p>
             <a:pPr indent="0" marL="0">
               <a:buNone/>
             </a:pPr>
             <a:r>
-              <a:rPr lang="en-US" sz="2200" b="1" dirty="0">
-                <a:solidFill>
-                  <a:srgbClr val="DC2626"/>
-                </a:solidFill>
-                <a:latin typeface="Trebuchet MS" pitchFamily="34" charset="0"/>
-                <a:ea typeface="Trebuchet MS" pitchFamily="34" charset="-122"/>
-                <a:cs typeface="Trebuchet MS" pitchFamily="34" charset="-120"/>
-              </a:rPr>
-              <a:t>NOTES ENSEIGNANT — Ch.7 D2 ADT et POO</a:t>
-            </a:r>
-            <a:endParaRPr lang="en-US" sz="2200" dirty="0"/>
+              <a:rPr lang="en-US" sz="2400" b="1" dirty="0">
+                <a:solidFill>
+                  <a:srgbClr val="FFFFFF"/>
+                </a:solidFill>
+                <a:latin typeface="Calibri" pitchFamily="34" charset="0"/>
+                <a:ea typeface="Calibri" pitchFamily="34" charset="-122"/>
+                <a:cs typeface="Calibri" pitchFamily="34" charset="-120"/>
+              </a:rPr>
+              <a:t>Ce que la POO AJOUTE aux ADT</a:t>
+            </a:r>
+            <a:endParaRPr lang="en-US" sz="2400" dirty="0"/>
           </a:p>
         </p:txBody>
       </p:sp>
@@ -2575,8 +2575,8 @@
         </p:nvSpPr>
         <p:spPr>
           <a:xfrm>
-            <a:off x="457200" y="731520"/>
-            <a:ext cx="8229600" cy="4114800"/>
+            <a:off x="548640" y="1005840"/>
+            <a:ext cx="8046720" cy="3657600"/>
           </a:xfrm>
           <a:prstGeom prst="rect">
             <a:avLst/>
@@ -2585,6 +2585,165 @@
           <a:ln/>
         </p:spPr>
         <p:txBody>
+          <a:bodyPr wrap="square" rtlCol="0" anchor="t"/>
+          <a:lstStyle/>
+          <a:p>
+            <a:pPr marL="342900" indent="-342900">
+              <a:lnSpc>
+                <a:spcPct val="130000"/>
+              </a:lnSpc>
+              <a:buSzPct val="100000"/>
+              <a:buChar char="•"/>
+            </a:pPr>
+            <a:r>
+              <a:rPr lang="en-US" sz="1400" dirty="0">
+                <a:solidFill>
+                  <a:srgbClr val="E2E8F0"/>
+                </a:solidFill>
+                <a:latin typeface="Calibri" pitchFamily="34" charset="0"/>
+                <a:ea typeface="Calibri" pitchFamily="34" charset="-122"/>
+                <a:cs typeface="Calibri" pitchFamily="34" charset="-120"/>
+              </a:rPr>
+              <a:t>Héritage : class Stack extends AbstractCollection</a:t>
+            </a:r>
+            <a:endParaRPr lang="en-US" sz="1400" dirty="0"/>
+          </a:p>
+          <a:p>
+            <a:pPr marL="342900" indent="-342900">
+              <a:lnSpc>
+                <a:spcPct val="130000"/>
+              </a:lnSpc>
+              <a:buSzPct val="100000"/>
+              <a:buChar char="•"/>
+            </a:pPr>
+            <a:r>
+              <a:rPr lang="en-US" sz="1400" dirty="0">
+                <a:solidFill>
+                  <a:srgbClr val="E2E8F0"/>
+                </a:solidFill>
+                <a:latin typeface="Calibri" pitchFamily="34" charset="0"/>
+                <a:ea typeface="Calibri" pitchFamily="34" charset="-122"/>
+                <a:cs typeface="Calibri" pitchFamily="34" charset="-120"/>
+              </a:rPr>
+              <a:t>Polymorphisme : List list = new ArrayList() ou new LinkedList()</a:t>
+            </a:r>
+            <a:endParaRPr lang="en-US" sz="1400" dirty="0"/>
+          </a:p>
+          <a:p>
+            <a:pPr marL="342900" indent="-342900">
+              <a:lnSpc>
+                <a:spcPct val="130000"/>
+              </a:lnSpc>
+              <a:buSzPct val="100000"/>
+              <a:buChar char="•"/>
+            </a:pPr>
+            <a:r>
+              <a:rPr lang="en-US" sz="1400" dirty="0">
+                <a:solidFill>
+                  <a:srgbClr val="E2E8F0"/>
+                </a:solidFill>
+                <a:latin typeface="Calibri" pitchFamily="34" charset="0"/>
+                <a:ea typeface="Calibri" pitchFamily="34" charset="-122"/>
+                <a:cs typeface="Calibri" pitchFamily="34" charset="-120"/>
+              </a:rPr>
+              <a:t>Relations entre objets : composition, agrégation</a:t>
+            </a:r>
+            <a:endParaRPr lang="en-US" sz="1400" dirty="0"/>
+          </a:p>
+          <a:p>
+            <a:pPr marL="342900" indent="-342900">
+              <a:lnSpc>
+                <a:spcPct val="130000"/>
+              </a:lnSpc>
+              <a:buSzPct val="100000"/>
+              <a:buChar char="•"/>
+            </a:pPr>
+            <a:r>
+              <a:rPr lang="en-US" sz="1400" dirty="0">
+                <a:solidFill>
+                  <a:srgbClr val="E2E8F0"/>
+                </a:solidFill>
+                <a:latin typeface="Calibri" pitchFamily="34" charset="0"/>
+                <a:ea typeface="Calibri" pitchFamily="34" charset="-122"/>
+                <a:cs typeface="Calibri" pitchFamily="34" charset="-120"/>
+              </a:rPr>
+              <a:t>Design Patterns : Singleton, Factory, Observer...</a:t>
+            </a:r>
+            <a:endParaRPr lang="en-US" sz="1400" dirty="0"/>
+          </a:p>
+          <a:p>
+            <a:pPr marL="342900" indent="-342900">
+              <a:lnSpc>
+                <a:spcPct val="130000"/>
+              </a:lnSpc>
+              <a:buSzPct val="100000"/>
+              <a:buChar char="•"/>
+            </a:pPr>
+            <a:r>
+              <a:rPr lang="en-US" sz="1400" dirty="0">
+                <a:solidFill>
+                  <a:srgbClr val="E2E8F0"/>
+                </a:solidFill>
+                <a:latin typeface="Calibri" pitchFamily="34" charset="0"/>
+                <a:ea typeface="Calibri" pitchFamily="34" charset="-122"/>
+                <a:cs typeface="Calibri" pitchFamily="34" charset="-120"/>
+              </a:rPr>
+              <a:t>Framework et bibliothèques : java.util.Collections</a:t>
+            </a:r>
+            <a:endParaRPr lang="en-US" sz="1400" dirty="0"/>
+          </a:p>
+        </p:txBody>
+      </p:sp>
+    </p:spTree>
+  </p:cSld>
+  <p:clrMapOvr>
+    <a:masterClrMapping/>
+  </p:clrMapOvr>
+</p:sld>
+</file>
+
+<file path=ppt/slides/slide6.xml><?xml version="1.0" encoding="utf-8"?>
+<p:sld xmlns:a="http://schemas.openxmlformats.org/drawingml/2006/main" xmlns:r="http://schemas.openxmlformats.org/officeDocument/2006/relationships" xmlns:p="http://schemas.openxmlformats.org/presentationml/2006/main">
+  <p:cSld name="Slide 6">
+    <p:bg>
+      <p:bgPr>
+        <a:solidFill>
+          <a:srgbClr val="0B2027"/>
+        </a:solidFill>
+      </p:bgPr>
+    </p:bg>
+    <p:spTree>
+      <p:nvGrpSpPr>
+        <p:cNvPr id="1" name=""/>
+        <p:cNvGrpSpPr/>
+        <p:nvPr/>
+      </p:nvGrpSpPr>
+      <p:grpSpPr>
+        <a:xfrm>
+          <a:off x="0" y="0"/>
+          <a:ext cx="0" cy="0"/>
+          <a:chOff x="0" y="0"/>
+          <a:chExt cx="0" cy="0"/>
+        </a:xfrm>
+      </p:grpSpPr>
+      <p:sp>
+        <p:nvSpPr>
+          <p:cNvPr id="2" name="Text 0"/>
+          <p:cNvSpPr/>
+          <p:nvPr/>
+        </p:nvSpPr>
+        <p:spPr>
+          <a:xfrm>
+            <a:off x="548640" y="274320"/>
+            <a:ext cx="8229600" cy="548640"/>
+          </a:xfrm>
+          <a:prstGeom prst="rect">
+            <a:avLst/>
+          </a:prstGeom>
+          <a:noFill/>
+          <a:ln/>
+        </p:spPr>
+        <p:txBody>
           <a:bodyPr wrap="square" rtlCol="0" anchor="ctr"/>
           <a:lstStyle/>
           <a:p>
@@ -2592,190 +2751,425 @@
               <a:buNone/>
             </a:pPr>
             <a:r>
-              <a:rPr lang="en-US" sz="1500" b="1" dirty="0">
-                <a:solidFill>
-                  <a:srgbClr val="00A896"/>
-                </a:solidFill>
-                <a:latin typeface="Trebuchet MS" pitchFamily="34" charset="0"/>
-                <a:ea typeface="Trebuchet MS" pitchFamily="34" charset="-122"/>
-                <a:cs typeface="Trebuchet MS" pitchFamily="34" charset="-120"/>
-              </a:rPr>
-              <a:t>Plan de séance :</a:t>
-            </a:r>
-            <a:endParaRPr lang="en-US" sz="1500" dirty="0"/>
-          </a:p>
-          <a:p>
-            <a:pPr indent="0" marL="0">
+              <a:rPr lang="en-US" sz="2800" b="1" dirty="0">
+                <a:solidFill>
+                  <a:srgbClr val="FFFFFF"/>
+                </a:solidFill>
+                <a:latin typeface="Calibri" pitchFamily="34" charset="0"/>
+                <a:ea typeface="Calibri" pitchFamily="34" charset="-122"/>
+                <a:cs typeface="Calibri" pitchFamily="34" charset="-120"/>
+              </a:rPr>
+              <a:t>Préparer la discussion D2</a:t>
+            </a:r>
+            <a:endParaRPr lang="en-US" sz="2800" dirty="0"/>
+          </a:p>
+        </p:txBody>
+      </p:sp>
+      <p:sp>
+        <p:nvSpPr>
+          <p:cNvPr id="3" name="Shape 1"/>
+          <p:cNvSpPr/>
+          <p:nvPr/>
+        </p:nvSpPr>
+        <p:spPr>
+          <a:xfrm>
+            <a:off x="548640" y="1097280"/>
+            <a:ext cx="2621280" cy="3200400"/>
+          </a:xfrm>
+          <a:prstGeom prst="roundRect">
+            <a:avLst>
+              <a:gd name="adj" fmla="val 3488"/>
+            </a:avLst>
+          </a:prstGeom>
+          <a:solidFill>
+            <a:srgbClr val="133740"/>
+          </a:solidFill>
+          <a:ln/>
+        </p:spPr>
+      </p:sp>
+      <p:sp>
+        <p:nvSpPr>
+          <p:cNvPr id="4" name="Text 2"/>
+          <p:cNvSpPr/>
+          <p:nvPr/>
+        </p:nvSpPr>
+        <p:spPr>
+          <a:xfrm>
+            <a:off x="548640" y="1280160"/>
+            <a:ext cx="2621280" cy="457200"/>
+          </a:xfrm>
+          <a:prstGeom prst="rect">
+            <a:avLst/>
+          </a:prstGeom>
+          <a:noFill/>
+          <a:ln/>
+        </p:spPr>
+        <p:txBody>
+          <a:bodyPr wrap="square" rtlCol="0" anchor="ctr"/>
+          <a:lstStyle/>
+          <a:p>
+            <a:pPr algn="ctr" indent="0" marL="0">
               <a:buNone/>
             </a:pPr>
-            <a:endParaRPr lang="en-US" sz="1500" dirty="0"/>
-          </a:p>
-          <a:p>
-            <a:pPr marL="342900" indent="-342900">
-              <a:buSzPct val="100000"/>
-              <a:buChar char="•"/>
-            </a:pPr>
-            <a:r>
-              <a:rPr lang="en-US" sz="1200" dirty="0">
-                <a:solidFill>
-                  <a:srgbClr val="E2E8F0"/>
-                </a:solidFill>
-                <a:latin typeface="Calibri" pitchFamily="34" charset="0"/>
-                <a:ea typeface="Calibri" pitchFamily="34" charset="-122"/>
-                <a:cs typeface="Calibri" pitchFamily="34" charset="-120"/>
-              </a:rPr>
-              <a:t>P1 : Présenter les 5 arguments ADT→POO avec exemples</a:t>
-            </a:r>
-            <a:endParaRPr lang="en-US" sz="1500" dirty="0"/>
-          </a:p>
-          <a:p>
-            <a:pPr marL="342900" indent="-342900">
-              <a:buSzPct val="100000"/>
-              <a:buChar char="•"/>
-            </a:pPr>
-            <a:r>
-              <a:rPr lang="en-US" sz="1200" dirty="0">
-                <a:solidFill>
-                  <a:srgbClr val="E2E8F0"/>
-                </a:solidFill>
-                <a:latin typeface="Calibri" pitchFamily="34" charset="0"/>
-                <a:ea typeface="Calibri" pitchFamily="34" charset="-122"/>
-                <a:cs typeface="Calibri" pitchFamily="34" charset="-120"/>
-              </a:rPr>
-              <a:t>P2 : Discussion en classe — les étudiants débattent</a:t>
-            </a:r>
-            <a:endParaRPr lang="en-US" sz="1500" dirty="0"/>
-          </a:p>
-          <a:p>
-            <a:pPr marL="342900" indent="-342900">
-              <a:buSzPct val="100000"/>
-              <a:buChar char="•"/>
-            </a:pPr>
-            <a:r>
-              <a:rPr lang="en-US" sz="1200" dirty="0">
-                <a:solidFill>
-                  <a:srgbClr val="E2E8F0"/>
-                </a:solidFill>
-                <a:latin typeface="Calibri" pitchFamily="34" charset="0"/>
-                <a:ea typeface="Calibri" pitchFamily="34" charset="-122"/>
-                <a:cs typeface="Calibri" pitchFamily="34" charset="-120"/>
-              </a:rPr>
-              <a:t>P3 : Mini-jeu web (explorer les arguments) + quiz</a:t>
-            </a:r>
-            <a:endParaRPr lang="en-US" sz="1500" dirty="0"/>
-          </a:p>
-          <a:p>
-            <a:pPr marL="342900" indent="-342900">
-              <a:buSzPct val="100000"/>
-              <a:buChar char="•"/>
-            </a:pPr>
-            <a:r>
-              <a:rPr lang="en-US" sz="1200" dirty="0">
-                <a:solidFill>
-                  <a:srgbClr val="E2E8F0"/>
-                </a:solidFill>
-                <a:latin typeface="Calibri" pitchFamily="34" charset="0"/>
-                <a:ea typeface="Calibri" pitchFamily="34" charset="-122"/>
-                <a:cs typeface="Calibri" pitchFamily="34" charset="-120"/>
-              </a:rPr>
-              <a:t>P4 : Exercice de rédaction : structurer l'argumentation pour le devoir</a:t>
-            </a:r>
-            <a:endParaRPr lang="en-US" sz="1500" dirty="0"/>
-          </a:p>
-          <a:p>
-            <a:pPr indent="0" marL="0">
+            <a:r>
+              <a:rPr lang="en-US" sz="2800" dirty="0">
+                <a:solidFill>
+                  <a:srgbClr val="000000"/>
+                </a:solidFill>
+              </a:rPr>
+              <a:t>🏛️</a:t>
+            </a:r>
+            <a:endParaRPr lang="en-US" sz="2800" dirty="0"/>
+          </a:p>
+        </p:txBody>
+      </p:sp>
+      <p:sp>
+        <p:nvSpPr>
+          <p:cNvPr id="5" name="Text 3"/>
+          <p:cNvSpPr/>
+          <p:nvPr/>
+        </p:nvSpPr>
+        <p:spPr>
+          <a:xfrm>
+            <a:off x="685800" y="1828800"/>
+            <a:ext cx="2346960" cy="365760"/>
+          </a:xfrm>
+          <a:prstGeom prst="rect">
+            <a:avLst/>
+          </a:prstGeom>
+          <a:noFill/>
+          <a:ln/>
+        </p:spPr>
+        <p:txBody>
+          <a:bodyPr wrap="square" rtlCol="0" anchor="ctr"/>
+          <a:lstStyle/>
+          <a:p>
+            <a:pPr algn="ctr" indent="0" marL="0">
               <a:buNone/>
             </a:pPr>
-            <a:endParaRPr lang="en-US" sz="1500" dirty="0"/>
-          </a:p>
-          <a:p>
-            <a:pPr indent="0" marL="0">
+            <a:r>
+              <a:rPr lang="en-US" sz="1300" b="1" dirty="0">
+                <a:solidFill>
+                  <a:srgbClr val="0891B2"/>
+                </a:solidFill>
+                <a:latin typeface="Calibri" pitchFamily="34" charset="0"/>
+                <a:ea typeface="Calibri" pitchFamily="34" charset="-122"/>
+                <a:cs typeface="Calibri" pitchFamily="34" charset="-120"/>
+              </a:rPr>
+              <a:t>5 Arguments</a:t>
+            </a:r>
+            <a:endParaRPr lang="en-US" sz="1300" dirty="0"/>
+          </a:p>
+        </p:txBody>
+      </p:sp>
+      <p:sp>
+        <p:nvSpPr>
+          <p:cNvPr id="6" name="Text 4"/>
+          <p:cNvSpPr/>
+          <p:nvPr/>
+        </p:nvSpPr>
+        <p:spPr>
+          <a:xfrm>
+            <a:off x="685800" y="2286000"/>
+            <a:ext cx="2346960" cy="1828800"/>
+          </a:xfrm>
+          <a:prstGeom prst="rect">
+            <a:avLst/>
+          </a:prstGeom>
+          <a:noFill/>
+          <a:ln/>
+        </p:spPr>
+        <p:txBody>
+          <a:bodyPr wrap="square" rtlCol="0" anchor="t"/>
+          <a:lstStyle/>
+          <a:p>
+            <a:pPr algn="ctr" indent="0" marL="0">
               <a:buNone/>
             </a:pPr>
             <a:r>
-              <a:rPr lang="en-US" sz="1400" b="1" dirty="0">
-                <a:solidFill>
-                  <a:srgbClr val="F97316"/>
-                </a:solidFill>
-                <a:latin typeface="Calibri" pitchFamily="34" charset="0"/>
-                <a:ea typeface="Calibri" pitchFamily="34" charset="-122"/>
-                <a:cs typeface="Calibri" pitchFamily="34" charset="-120"/>
-              </a:rPr>
-              <a:t>Critère D2 — l'étudiant doit :</a:t>
-            </a:r>
-            <a:endParaRPr lang="en-US" sz="1500" dirty="0"/>
-          </a:p>
-          <a:p>
-            <a:pPr marL="342900" indent="-342900">
-              <a:buSzPct val="100000"/>
-              <a:buChar char="•"/>
-            </a:pPr>
-            <a:r>
-              <a:rPr lang="en-US" sz="1200" dirty="0">
-                <a:solidFill>
-                  <a:srgbClr val="E2E8F0"/>
-                </a:solidFill>
-                <a:latin typeface="Calibri" pitchFamily="34" charset="0"/>
-                <a:ea typeface="Calibri" pitchFamily="34" charset="-122"/>
-                <a:cs typeface="Calibri" pitchFamily="34" charset="-120"/>
-              </a:rPr>
-              <a:t>Discuter le point de vue avec argumentation structurée</a:t>
-            </a:r>
-            <a:endParaRPr lang="en-US" sz="1500" dirty="0"/>
-          </a:p>
-          <a:p>
-            <a:pPr marL="342900" indent="-342900">
-              <a:buSzPct val="100000"/>
-              <a:buChar char="•"/>
-            </a:pPr>
-            <a:r>
-              <a:rPr lang="en-US" sz="1200" dirty="0">
-                <a:solidFill>
-                  <a:srgbClr val="E2E8F0"/>
-                </a:solidFill>
-                <a:latin typeface="Calibri" pitchFamily="34" charset="0"/>
-                <a:ea typeface="Calibri" pitchFamily="34" charset="-122"/>
-                <a:cs typeface="Calibri" pitchFamily="34" charset="-120"/>
-              </a:rPr>
-              <a:t>Fournir au moins 3 arguments avec exemples concrets</a:t>
-            </a:r>
-            <a:endParaRPr lang="en-US" sz="1500" dirty="0"/>
-          </a:p>
-          <a:p>
-            <a:pPr marL="342900" indent="-342900">
-              <a:buSzPct val="100000"/>
-              <a:buChar char="•"/>
-            </a:pPr>
-            <a:r>
-              <a:rPr lang="en-US" sz="1200" dirty="0">
-                <a:solidFill>
-                  <a:srgbClr val="E2E8F0"/>
-                </a:solidFill>
-                <a:latin typeface="Calibri" pitchFamily="34" charset="0"/>
-                <a:ea typeface="Calibri" pitchFamily="34" charset="-122"/>
-                <a:cs typeface="Calibri" pitchFamily="34" charset="-120"/>
-              </a:rPr>
-              <a:t>Distinguer ce qui vient des ADT vs ce que la POO ajoute</a:t>
-            </a:r>
-            <a:endParaRPr lang="en-US" sz="1500" dirty="0"/>
-          </a:p>
-          <a:p>
-            <a:pPr marL="342900" indent="-342900">
-              <a:buSzPct val="100000"/>
-              <a:buChar char="•"/>
-            </a:pPr>
-            <a:r>
-              <a:rPr lang="en-US" sz="1200" dirty="0">
-                <a:solidFill>
-                  <a:srgbClr val="E2E8F0"/>
-                </a:solidFill>
-                <a:latin typeface="Calibri" pitchFamily="34" charset="0"/>
-                <a:ea typeface="Calibri" pitchFamily="34" charset="-122"/>
-                <a:cs typeface="Calibri" pitchFamily="34" charset="-120"/>
-              </a:rPr>
-              <a:t>Justifier la position avec du code Java (interface vs classe)</a:t>
-            </a:r>
-            <a:endParaRPr lang="en-US" sz="1500" dirty="0"/>
+              <a:rPr lang="en-US" sz="1100" dirty="0">
+                <a:solidFill>
+                  <a:srgbClr val="94A3B8"/>
+                </a:solidFill>
+                <a:latin typeface="Calibri" pitchFamily="34" charset="0"/>
+                <a:ea typeface="Calibri" pitchFamily="34" charset="-122"/>
+                <a:cs typeface="Calibri" pitchFamily="34" charset="-120"/>
+              </a:rPr>
+              <a:t>Encapsulation, Abstraction, État, Réutilisation, Contrats</a:t>
+            </a:r>
+            <a:endParaRPr lang="en-US" sz="1100" dirty="0"/>
+          </a:p>
+        </p:txBody>
+      </p:sp>
+      <p:sp>
+        <p:nvSpPr>
+          <p:cNvPr id="7" name="Shape 5"/>
+          <p:cNvSpPr/>
+          <p:nvPr/>
+        </p:nvSpPr>
+        <p:spPr>
+          <a:xfrm>
+            <a:off x="3352800" y="1097280"/>
+            <a:ext cx="2621280" cy="3200400"/>
+          </a:xfrm>
+          <a:prstGeom prst="roundRect">
+            <a:avLst>
+              <a:gd name="adj" fmla="val 3488"/>
+            </a:avLst>
+          </a:prstGeom>
+          <a:solidFill>
+            <a:srgbClr val="133740"/>
+          </a:solidFill>
+          <a:ln/>
+        </p:spPr>
+      </p:sp>
+      <p:sp>
+        <p:nvSpPr>
+          <p:cNvPr id="8" name="Text 6"/>
+          <p:cNvSpPr/>
+          <p:nvPr/>
+        </p:nvSpPr>
+        <p:spPr>
+          <a:xfrm>
+            <a:off x="3352800" y="1280160"/>
+            <a:ext cx="2621280" cy="457200"/>
+          </a:xfrm>
+          <a:prstGeom prst="rect">
+            <a:avLst/>
+          </a:prstGeom>
+          <a:noFill/>
+          <a:ln/>
+        </p:spPr>
+        <p:txBody>
+          <a:bodyPr wrap="square" rtlCol="0" anchor="ctr"/>
+          <a:lstStyle/>
+          <a:p>
+            <a:pPr algn="ctr" indent="0" marL="0">
+              <a:buNone/>
+            </a:pPr>
+            <a:r>
+              <a:rPr lang="en-US" sz="2800" dirty="0">
+                <a:solidFill>
+                  <a:srgbClr val="000000"/>
+                </a:solidFill>
+              </a:rPr>
+              <a:t>⚡</a:t>
+            </a:r>
+            <a:endParaRPr lang="en-US" sz="2800" dirty="0"/>
+          </a:p>
+        </p:txBody>
+      </p:sp>
+      <p:sp>
+        <p:nvSpPr>
+          <p:cNvPr id="9" name="Text 7"/>
+          <p:cNvSpPr/>
+          <p:nvPr/>
+        </p:nvSpPr>
+        <p:spPr>
+          <a:xfrm>
+            <a:off x="3489960" y="1828800"/>
+            <a:ext cx="2346960" cy="365760"/>
+          </a:xfrm>
+          <a:prstGeom prst="rect">
+            <a:avLst/>
+          </a:prstGeom>
+          <a:noFill/>
+          <a:ln/>
+        </p:spPr>
+        <p:txBody>
+          <a:bodyPr wrap="square" rtlCol="0" anchor="ctr"/>
+          <a:lstStyle/>
+          <a:p>
+            <a:pPr algn="ctr" indent="0" marL="0">
+              <a:buNone/>
+            </a:pPr>
+            <a:r>
+              <a:rPr lang="en-US" sz="1300" b="1" dirty="0">
+                <a:solidFill>
+                  <a:srgbClr val="0891B2"/>
+                </a:solidFill>
+                <a:latin typeface="Calibri" pitchFamily="34" charset="0"/>
+                <a:ea typeface="Calibri" pitchFamily="34" charset="-122"/>
+                <a:cs typeface="Calibri" pitchFamily="34" charset="-120"/>
+              </a:rPr>
+              <a:t>Conditions</a:t>
+            </a:r>
+            <a:endParaRPr lang="en-US" sz="1300" dirty="0"/>
+          </a:p>
+        </p:txBody>
+      </p:sp>
+      <p:sp>
+        <p:nvSpPr>
+          <p:cNvPr id="10" name="Text 8"/>
+          <p:cNvSpPr/>
+          <p:nvPr/>
+        </p:nvSpPr>
+        <p:spPr>
+          <a:xfrm>
+            <a:off x="3489960" y="2286000"/>
+            <a:ext cx="2346960" cy="1828800"/>
+          </a:xfrm>
+          <a:prstGeom prst="rect">
+            <a:avLst/>
+          </a:prstGeom>
+          <a:noFill/>
+          <a:ln/>
+        </p:spPr>
+        <p:txBody>
+          <a:bodyPr wrap="square" rtlCol="0" anchor="t"/>
+          <a:lstStyle/>
+          <a:p>
+            <a:pPr algn="ctr" indent="0" marL="0">
+              <a:buNone/>
+            </a:pPr>
+            <a:r>
+              <a:rPr lang="en-US" sz="1100" dirty="0">
+                <a:solidFill>
+                  <a:srgbClr val="94A3B8"/>
+                </a:solidFill>
+                <a:latin typeface="Calibri" pitchFamily="34" charset="0"/>
+                <a:ea typeface="Calibri" pitchFamily="34" charset="-122"/>
+                <a:cs typeface="Calibri" pitchFamily="34" charset="-120"/>
+              </a:rPr>
+              <a:t>Pré, Post, Error → Exceptions Java</a:t>
+            </a:r>
+            <a:endParaRPr lang="en-US" sz="1100" dirty="0"/>
+          </a:p>
+        </p:txBody>
+      </p:sp>
+      <p:sp>
+        <p:nvSpPr>
+          <p:cNvPr id="11" name="Shape 9"/>
+          <p:cNvSpPr/>
+          <p:nvPr/>
+        </p:nvSpPr>
+        <p:spPr>
+          <a:xfrm>
+            <a:off x="6156960" y="1097280"/>
+            <a:ext cx="2621280" cy="3200400"/>
+          </a:xfrm>
+          <a:prstGeom prst="roundRect">
+            <a:avLst>
+              <a:gd name="adj" fmla="val 3488"/>
+            </a:avLst>
+          </a:prstGeom>
+          <a:solidFill>
+            <a:srgbClr val="133740"/>
+          </a:solidFill>
+          <a:ln/>
+        </p:spPr>
+      </p:sp>
+      <p:sp>
+        <p:nvSpPr>
+          <p:cNvPr id="12" name="Text 10"/>
+          <p:cNvSpPr/>
+          <p:nvPr/>
+        </p:nvSpPr>
+        <p:spPr>
+          <a:xfrm>
+            <a:off x="6156960" y="1280160"/>
+            <a:ext cx="2621280" cy="457200"/>
+          </a:xfrm>
+          <a:prstGeom prst="rect">
+            <a:avLst/>
+          </a:prstGeom>
+          <a:noFill/>
+          <a:ln/>
+        </p:spPr>
+        <p:txBody>
+          <a:bodyPr wrap="square" rtlCol="0" anchor="ctr"/>
+          <a:lstStyle/>
+          <a:p>
+            <a:pPr algn="ctr" indent="0" marL="0">
+              <a:buNone/>
+            </a:pPr>
+            <a:r>
+              <a:rPr lang="en-US" sz="2800" dirty="0">
+                <a:solidFill>
+                  <a:srgbClr val="000000"/>
+                </a:solidFill>
+              </a:rPr>
+              <a:t>🔄</a:t>
+            </a:r>
+            <a:endParaRPr lang="en-US" sz="2800" dirty="0"/>
+          </a:p>
+        </p:txBody>
+      </p:sp>
+      <p:sp>
+        <p:nvSpPr>
+          <p:cNvPr id="13" name="Text 11"/>
+          <p:cNvSpPr/>
+          <p:nvPr/>
+        </p:nvSpPr>
+        <p:spPr>
+          <a:xfrm>
+            <a:off x="6294120" y="1828800"/>
+            <a:ext cx="2346960" cy="365760"/>
+          </a:xfrm>
+          <a:prstGeom prst="rect">
+            <a:avLst/>
+          </a:prstGeom>
+          <a:noFill/>
+          <a:ln/>
+        </p:spPr>
+        <p:txBody>
+          <a:bodyPr wrap="square" rtlCol="0" anchor="ctr"/>
+          <a:lstStyle/>
+          <a:p>
+            <a:pPr algn="ctr" indent="0" marL="0">
+              <a:buNone/>
+            </a:pPr>
+            <a:r>
+              <a:rPr lang="en-US" sz="1300" b="1" dirty="0">
+                <a:solidFill>
+                  <a:srgbClr val="0891B2"/>
+                </a:solidFill>
+                <a:latin typeface="Calibri" pitchFamily="34" charset="0"/>
+                <a:ea typeface="Calibri" pitchFamily="34" charset="-122"/>
+                <a:cs typeface="Calibri" pitchFamily="34" charset="-120"/>
+              </a:rPr>
+              <a:t>Traduction</a:t>
+            </a:r>
+            <a:endParaRPr lang="en-US" sz="1300" dirty="0"/>
+          </a:p>
+        </p:txBody>
+      </p:sp>
+      <p:sp>
+        <p:nvSpPr>
+          <p:cNvPr id="14" name="Text 12"/>
+          <p:cNvSpPr/>
+          <p:nvPr/>
+        </p:nvSpPr>
+        <p:spPr>
+          <a:xfrm>
+            <a:off x="6294120" y="2286000"/>
+            <a:ext cx="2346960" cy="1828800"/>
+          </a:xfrm>
+          <a:prstGeom prst="rect">
+            <a:avLst/>
+          </a:prstGeom>
+          <a:noFill/>
+          <a:ln/>
+        </p:spPr>
+        <p:txBody>
+          <a:bodyPr wrap="square" rtlCol="0" anchor="t"/>
+          <a:lstStyle/>
+          <a:p>
+            <a:pPr algn="ctr" indent="0" marL="0">
+              <a:buNone/>
+            </a:pPr>
+            <a:r>
+              <a:rPr lang="en-US" sz="1100" dirty="0">
+                <a:solidFill>
+                  <a:srgbClr val="94A3B8"/>
+                </a:solidFill>
+                <a:latin typeface="Calibri" pitchFamily="34" charset="0"/>
+                <a:ea typeface="Calibri" pitchFamily="34" charset="-122"/>
+                <a:cs typeface="Calibri" pitchFamily="34" charset="-120"/>
+              </a:rPr>
+              <a:t>ADT spec → Interface + Classe Java</a:t>
+            </a:r>
+            <a:endParaRPr lang="en-US" sz="1100" dirty="0"/>
           </a:p>
         </p:txBody>
       </p:sp>
